--- a/docs/theme-preview/pptx/glass.pptx
+++ b/docs/theme-preview/pptx/glass.pptx
@@ -13435,7 +13435,7 @@
                 <a:ea typeface="Pretendard" pitchFamily="34" charset="-122"/>
                 <a:cs typeface="Pretendard" pitchFamily="34" charset="-120"/>
               </a:rPr>
-              <a:t>Markdown Semantics</a:t>
+              <a:t>Semantic Blocks</a:t>
             </a:r>
             <a:endParaRPr lang="en-US" sz="2200" dirty="0"/>
           </a:p>
@@ -18109,7 +18109,7 @@
                 <a:ea typeface="Pretendard" pitchFamily="34" charset="-122"/>
                 <a:cs typeface="Pretendard" pitchFamily="34" charset="-120"/>
               </a:rPr>
-              <a:t>Markdown Semantics</a:t>
+              <a:t>Semantic Blocks</a:t>
             </a:r>
             <a:endParaRPr lang="en-US" sz="3400" dirty="0"/>
           </a:p>

--- a/docs/theme-preview/pptx/glass.pptx
+++ b/docs/theme-preview/pptx/glass.pptx
@@ -125,7 +125,7 @@
 </p:presentation>
 </file>
 
-<file path=ppt/charts/chart9.xml><?xml version="1.0" encoding="utf-8"?>
+<file path=ppt/charts/chart7.xml><?xml version="1.0" encoding="utf-8"?>
 <c:chartSpace xmlns:c="http://schemas.openxmlformats.org/drawingml/2006/chart" xmlns:a="http://schemas.openxmlformats.org/drawingml/2006/main" xmlns:r="http://schemas.openxmlformats.org/officeDocument/2006/relationships">
   <c:date1904 val="0"/>
   <c:roundedCorners val="1"/>
@@ -12235,8 +12235,37 @@
         </p:nvSpPr>
         <p:spPr>
           <a:xfrm>
-            <a:off x="914400" y="1417320"/>
-            <a:ext cx="73152" cy="868680"/>
+            <a:off x="786384" y="1956816"/>
+            <a:ext cx="32004" cy="3483864"/>
+          </a:xfrm>
+          <a:prstGeom prst="rect">
+            <a:avLst/>
+          </a:prstGeom>
+          <a:solidFill>
+            <a:srgbClr val="22D3EE">
+              <a:alpha val="80000"/>
+            </a:srgbClr>
+          </a:solidFill>
+          <a:ln w="12700">
+            <a:solidFill>
+              <a:srgbClr val="22D3EE">
+                <a:alpha val="0"/>
+              </a:srgbClr>
+            </a:solidFill>
+            <a:prstDash val="solid"/>
+          </a:ln>
+        </p:spPr>
+      </p:sp>
+      <p:sp>
+        <p:nvSpPr>
+          <p:cNvPr id="12" name="Shape 10"/>
+          <p:cNvSpPr/>
+          <p:nvPr/>
+        </p:nvSpPr>
+        <p:spPr>
+          <a:xfrm>
+            <a:off x="914400" y="1865376"/>
+            <a:ext cx="73152" cy="1024128"/>
           </a:xfrm>
           <a:prstGeom prst="rect">
             <a:avLst/>
@@ -12256,14 +12285,14 @@
       </p:sp>
       <p:sp>
         <p:nvSpPr>
-          <p:cNvPr id="12" name="Shape 10"/>
-          <p:cNvSpPr/>
-          <p:nvPr/>
-        </p:nvSpPr>
-        <p:spPr>
-          <a:xfrm>
-            <a:off x="914400" y="2560320"/>
-            <a:ext cx="73152" cy="868680"/>
+          <p:cNvPr id="13" name="Shape 11"/>
+          <p:cNvSpPr/>
+          <p:nvPr/>
+        </p:nvSpPr>
+        <p:spPr>
+          <a:xfrm>
+            <a:off x="914400" y="3191256"/>
+            <a:ext cx="73152" cy="1024128"/>
           </a:xfrm>
           <a:prstGeom prst="rect">
             <a:avLst/>
@@ -12283,14 +12312,14 @@
       </p:sp>
       <p:sp>
         <p:nvSpPr>
-          <p:cNvPr id="13" name="Shape 11"/>
-          <p:cNvSpPr/>
-          <p:nvPr/>
-        </p:nvSpPr>
-        <p:spPr>
-          <a:xfrm>
-            <a:off x="914400" y="3703320"/>
-            <a:ext cx="73152" cy="868680"/>
+          <p:cNvPr id="14" name="Shape 12"/>
+          <p:cNvSpPr/>
+          <p:nvPr/>
+        </p:nvSpPr>
+        <p:spPr>
+          <a:xfrm>
+            <a:off x="914400" y="4507992"/>
+            <a:ext cx="73152" cy="1024128"/>
           </a:xfrm>
           <a:prstGeom prst="rect">
             <a:avLst/>
@@ -12310,7 +12339,7 @@
       </p:sp>
       <p:pic>
         <p:nvPicPr>
-          <p:cNvPr id="14" name="Image 0" descr="preencoded.png">    </p:cNvPr>
+          <p:cNvPr id="15" name="Image 0" descr="preencoded.png">    </p:cNvPr>
           <p:cNvPicPr>
             <a:picLocks noChangeAspect="1"/>
           </p:cNvPicPr>
@@ -12330,8 +12359,8 @@
         </p:blipFill>
         <p:spPr>
           <a:xfrm>
-            <a:off x="914400" y="1417320"/>
-            <a:ext cx="10241280" cy="868680"/>
+            <a:off x="914400" y="1865376"/>
+            <a:ext cx="10241280" cy="1024128"/>
           </a:xfrm>
           <a:prstGeom prst="rect">
             <a:avLst/>
@@ -12340,14 +12369,14 @@
       </p:pic>
       <p:sp>
         <p:nvSpPr>
-          <p:cNvPr id="15" name="Shape 12"/>
-          <p:cNvSpPr/>
-          <p:nvPr/>
-        </p:nvSpPr>
-        <p:spPr>
-          <a:xfrm>
-            <a:off x="914400" y="1417320"/>
-            <a:ext cx="10241280" cy="868680"/>
+          <p:cNvPr id="16" name="Shape 13"/>
+          <p:cNvSpPr/>
+          <p:nvPr/>
+        </p:nvSpPr>
+        <p:spPr>
+          <a:xfrm>
+            <a:off x="914400" y="1865376"/>
+            <a:ext cx="10241280" cy="1024128"/>
           </a:xfrm>
           <a:prstGeom prst="rect">
             <a:avLst/>
@@ -12381,7 +12410,7 @@
       </p:sp>
       <p:pic>
         <p:nvPicPr>
-          <p:cNvPr id="16" name="Image 1" descr="preencoded.png">    </p:cNvPr>
+          <p:cNvPr id="17" name="Image 1" descr="preencoded.png">    </p:cNvPr>
           <p:cNvPicPr>
             <a:picLocks noChangeAspect="1"/>
           </p:cNvPicPr>
@@ -12401,8 +12430,8 @@
         </p:blipFill>
         <p:spPr>
           <a:xfrm>
-            <a:off x="914400" y="2560320"/>
-            <a:ext cx="10241280" cy="868680"/>
+            <a:off x="914400" y="3191256"/>
+            <a:ext cx="10241280" cy="1024128"/>
           </a:xfrm>
           <a:prstGeom prst="rect">
             <a:avLst/>
@@ -12411,14 +12440,14 @@
       </p:pic>
       <p:sp>
         <p:nvSpPr>
-          <p:cNvPr id="17" name="Shape 13"/>
-          <p:cNvSpPr/>
-          <p:nvPr/>
-        </p:nvSpPr>
-        <p:spPr>
-          <a:xfrm>
-            <a:off x="914400" y="2560320"/>
-            <a:ext cx="10241280" cy="868680"/>
+          <p:cNvPr id="18" name="Shape 14"/>
+          <p:cNvSpPr/>
+          <p:nvPr/>
+        </p:nvSpPr>
+        <p:spPr>
+          <a:xfrm>
+            <a:off x="914400" y="3191256"/>
+            <a:ext cx="10241280" cy="1024128"/>
           </a:xfrm>
           <a:prstGeom prst="rect">
             <a:avLst/>
@@ -12452,7 +12481,7 @@
       </p:sp>
       <p:pic>
         <p:nvPicPr>
-          <p:cNvPr id="18" name="Image 2" descr="preencoded.png">    </p:cNvPr>
+          <p:cNvPr id="19" name="Image 2" descr="preencoded.png">    </p:cNvPr>
           <p:cNvPicPr>
             <a:picLocks noChangeAspect="1"/>
           </p:cNvPicPr>
@@ -12472,8 +12501,8 @@
         </p:blipFill>
         <p:spPr>
           <a:xfrm>
-            <a:off x="914400" y="3703320"/>
-            <a:ext cx="10241280" cy="868680"/>
+            <a:off x="914400" y="4507992"/>
+            <a:ext cx="10241280" cy="1024128"/>
           </a:xfrm>
           <a:prstGeom prst="rect">
             <a:avLst/>
@@ -12482,14 +12511,14 @@
       </p:pic>
       <p:sp>
         <p:nvSpPr>
-          <p:cNvPr id="19" name="Shape 14"/>
-          <p:cNvSpPr/>
-          <p:nvPr/>
-        </p:nvSpPr>
-        <p:spPr>
-          <a:xfrm>
-            <a:off x="914400" y="3703320"/>
-            <a:ext cx="10241280" cy="868680"/>
+          <p:cNvPr id="20" name="Shape 15"/>
+          <p:cNvSpPr/>
+          <p:nvPr/>
+        </p:nvSpPr>
+        <p:spPr>
+          <a:xfrm>
+            <a:off x="914400" y="4507992"/>
+            <a:ext cx="10241280" cy="1024128"/>
           </a:xfrm>
           <a:prstGeom prst="rect">
             <a:avLst/>
@@ -12523,7 +12552,7 @@
       </p:sp>
       <p:sp>
         <p:nvSpPr>
-          <p:cNvPr id="20" name="Text 15"/>
+          <p:cNvPr id="21" name="Text 16"/>
           <p:cNvSpPr txBox="1"/>
           <p:nvPr/>
         </p:nvSpPr>
@@ -12565,18 +12594,18 @@
       </p:sp>
       <p:sp>
         <p:nvSpPr>
-          <p:cNvPr id="21" name="Shape 16"/>
-          <p:cNvSpPr/>
-          <p:nvPr/>
-        </p:nvSpPr>
-        <p:spPr>
-          <a:xfrm>
-            <a:off x="1097280" y="1623060"/>
-            <a:ext cx="457200" cy="457200"/>
+          <p:cNvPr id="22" name="Shape 17"/>
+          <p:cNvSpPr/>
+          <p:nvPr/>
+        </p:nvSpPr>
+        <p:spPr>
+          <a:xfrm>
+            <a:off x="1097280" y="2140428"/>
+            <a:ext cx="474025" cy="474025"/>
           </a:xfrm>
           <a:prstGeom prst="roundRect">
             <a:avLst>
-              <a:gd name="adj" fmla="val 8000"/>
+              <a:gd name="adj" fmla="val 7716"/>
             </a:avLst>
           </a:prstGeom>
           <a:solidFill>
@@ -12592,7 +12621,7 @@
       </p:sp>
       <p:pic>
         <p:nvPicPr>
-          <p:cNvPr id="22" name="Image 3" descr="flow icon from tabler-icons (MIT)">    </p:cNvPr>
+          <p:cNvPr id="23" name="Image 3" descr="flow icon from tabler-icons (MIT)">    </p:cNvPr>
           <p:cNvPicPr>
             <a:picLocks noChangeAspect="1"/>
           </p:cNvPicPr>
@@ -12612,8 +12641,8 @@
         </p:blipFill>
         <p:spPr>
           <a:xfrm>
-            <a:off x="1170432" y="1696212"/>
-            <a:ext cx="310896" cy="310896"/>
+            <a:off x="1170432" y="2213580"/>
+            <a:ext cx="327721" cy="327721"/>
           </a:xfrm>
           <a:prstGeom prst="rect">
             <a:avLst/>
@@ -12622,14 +12651,14 @@
       </p:pic>
       <p:sp>
         <p:nvSpPr>
-          <p:cNvPr id="23" name="Text 17"/>
+          <p:cNvPr id="24" name="Text 18"/>
           <p:cNvSpPr txBox="1"/>
           <p:nvPr/>
         </p:nvSpPr>
         <p:spPr>
           <a:xfrm>
-            <a:off x="1682496" y="1508760"/>
-            <a:ext cx="9272016" cy="685800"/>
+            <a:off x="1699321" y="1957548"/>
+            <a:ext cx="9255191" cy="839785"/>
           </a:xfrm>
           <a:prstGeom prst="rect">
             <a:avLst/>
@@ -12681,18 +12710,18 @@
       </p:sp>
       <p:sp>
         <p:nvSpPr>
-          <p:cNvPr id="24" name="Shape 18"/>
-          <p:cNvSpPr/>
-          <p:nvPr/>
-        </p:nvSpPr>
-        <p:spPr>
-          <a:xfrm>
-            <a:off x="1097280" y="2766060"/>
-            <a:ext cx="457200" cy="457200"/>
+          <p:cNvPr id="25" name="Shape 19"/>
+          <p:cNvSpPr/>
+          <p:nvPr/>
+        </p:nvSpPr>
+        <p:spPr>
+          <a:xfrm>
+            <a:off x="1097280" y="3466308"/>
+            <a:ext cx="474025" cy="474025"/>
           </a:xfrm>
           <a:prstGeom prst="roundRect">
             <a:avLst>
-              <a:gd name="adj" fmla="val 8000"/>
+              <a:gd name="adj" fmla="val 7716"/>
             </a:avLst>
           </a:prstGeom>
           <a:solidFill>
@@ -12708,7 +12737,7 @@
       </p:sp>
       <p:pic>
         <p:nvPicPr>
-          <p:cNvPr id="25" name="Image 4" descr="verified icon from tabler-icons (MIT)">    </p:cNvPr>
+          <p:cNvPr id="26" name="Image 4" descr="verified icon from tabler-icons (MIT)">    </p:cNvPr>
           <p:cNvPicPr>
             <a:picLocks noChangeAspect="1"/>
           </p:cNvPicPr>
@@ -12728,8 +12757,8 @@
         </p:blipFill>
         <p:spPr>
           <a:xfrm>
-            <a:off x="1170432" y="2839212"/>
-            <a:ext cx="310896" cy="310896"/>
+            <a:off x="1170432" y="3539460"/>
+            <a:ext cx="327721" cy="327721"/>
           </a:xfrm>
           <a:prstGeom prst="rect">
             <a:avLst/>
@@ -12738,14 +12767,14 @@
       </p:pic>
       <p:sp>
         <p:nvSpPr>
-          <p:cNvPr id="26" name="Text 19"/>
+          <p:cNvPr id="27" name="Text 20"/>
           <p:cNvSpPr txBox="1"/>
           <p:nvPr/>
         </p:nvSpPr>
         <p:spPr>
           <a:xfrm>
-            <a:off x="1682496" y="2651760"/>
-            <a:ext cx="9272016" cy="685800"/>
+            <a:off x="1699321" y="3283428"/>
+            <a:ext cx="9255191" cy="839785"/>
           </a:xfrm>
           <a:prstGeom prst="rect">
             <a:avLst/>
@@ -12797,18 +12826,18 @@
       </p:sp>
       <p:sp>
         <p:nvSpPr>
-          <p:cNvPr id="27" name="Shape 20"/>
-          <p:cNvSpPr/>
-          <p:nvPr/>
-        </p:nvSpPr>
-        <p:spPr>
-          <a:xfrm>
-            <a:off x="1097280" y="3909060"/>
-            <a:ext cx="457200" cy="457200"/>
+          <p:cNvPr id="28" name="Shape 21"/>
+          <p:cNvSpPr/>
+          <p:nvPr/>
+        </p:nvSpPr>
+        <p:spPr>
+          <a:xfrm>
+            <a:off x="1097280" y="4783044"/>
+            <a:ext cx="474025" cy="474025"/>
           </a:xfrm>
           <a:prstGeom prst="roundRect">
             <a:avLst>
-              <a:gd name="adj" fmla="val 8000"/>
+              <a:gd name="adj" fmla="val 7716"/>
             </a:avLst>
           </a:prstGeom>
           <a:solidFill>
@@ -12824,7 +12853,7 @@
       </p:sp>
       <p:pic>
         <p:nvPicPr>
-          <p:cNvPr id="28" name="Image 5" descr="spark icon from tabler-icons (MIT)">    </p:cNvPr>
+          <p:cNvPr id="29" name="Image 5" descr="spark icon from tabler-icons (MIT)">    </p:cNvPr>
           <p:cNvPicPr>
             <a:picLocks noChangeAspect="1"/>
           </p:cNvPicPr>
@@ -12844,8 +12873,8 @@
         </p:blipFill>
         <p:spPr>
           <a:xfrm>
-            <a:off x="1170432" y="3982212"/>
-            <a:ext cx="310896" cy="310896"/>
+            <a:off x="1170432" y="4856196"/>
+            <a:ext cx="327721" cy="327721"/>
           </a:xfrm>
           <a:prstGeom prst="rect">
             <a:avLst/>
@@ -12854,14 +12883,14 @@
       </p:pic>
       <p:sp>
         <p:nvSpPr>
-          <p:cNvPr id="29" name="Text 21"/>
+          <p:cNvPr id="30" name="Text 22"/>
           <p:cNvSpPr txBox="1"/>
           <p:nvPr/>
         </p:nvSpPr>
         <p:spPr>
           <a:xfrm>
-            <a:off x="1682496" y="3794760"/>
-            <a:ext cx="9272016" cy="685800"/>
+            <a:off x="1699321" y="4600164"/>
+            <a:ext cx="9255191" cy="839785"/>
           </a:xfrm>
           <a:prstGeom prst="rect">
             <a:avLst/>
@@ -13212,8 +13241,8 @@
         </p:nvSpPr>
         <p:spPr>
           <a:xfrm>
-            <a:off x="914400" y="1463040"/>
-            <a:ext cx="10241280" cy="73152"/>
+            <a:off x="822960" y="1188720"/>
+            <a:ext cx="10515600" cy="45720"/>
           </a:xfrm>
           <a:prstGeom prst="rect">
             <a:avLst/>
@@ -13233,7 +13262,387 @@
       </p:sp>
       <p:sp>
         <p:nvSpPr>
-          <p:cNvPr id="12" name="Text 10"/>
+          <p:cNvPr id="12" name="Shape 10"/>
+          <p:cNvSpPr/>
+          <p:nvPr/>
+        </p:nvSpPr>
+        <p:spPr>
+          <a:xfrm>
+            <a:off x="822960" y="6199632"/>
+            <a:ext cx="2011680" cy="45720"/>
+          </a:xfrm>
+          <a:prstGeom prst="rect">
+            <a:avLst/>
+          </a:prstGeom>
+          <a:solidFill>
+            <a:srgbClr val="22D3EE"/>
+          </a:solidFill>
+          <a:ln w="12700">
+            <a:solidFill>
+              <a:srgbClr val="22D3EE">
+                <a:alpha val="0"/>
+              </a:srgbClr>
+            </a:solidFill>
+            <a:prstDash val="solid"/>
+          </a:ln>
+        </p:spPr>
+      </p:sp>
+      <p:sp>
+        <p:nvSpPr>
+          <p:cNvPr id="13" name="Shape 11"/>
+          <p:cNvSpPr/>
+          <p:nvPr/>
+        </p:nvSpPr>
+        <p:spPr>
+          <a:xfrm>
+            <a:off x="6080760" y="1389888"/>
+            <a:ext cx="22860" cy="4663440"/>
+          </a:xfrm>
+          <a:prstGeom prst="rect">
+            <a:avLst/>
+          </a:prstGeom>
+          <a:solidFill>
+            <a:srgbClr val="C4B5FD">
+              <a:alpha val="90000"/>
+            </a:srgbClr>
+          </a:solidFill>
+          <a:ln w="12700">
+            <a:solidFill>
+              <a:srgbClr val="C4B5FD">
+                <a:alpha val="0"/>
+              </a:srgbClr>
+            </a:solidFill>
+            <a:prstDash val="solid"/>
+          </a:ln>
+        </p:spPr>
+      </p:sp>
+      <p:sp>
+        <p:nvSpPr>
+          <p:cNvPr id="14" name="Shape 12"/>
+          <p:cNvSpPr/>
+          <p:nvPr/>
+        </p:nvSpPr>
+        <p:spPr>
+          <a:xfrm>
+            <a:off x="822960" y="1389888"/>
+            <a:ext cx="73152" cy="658368"/>
+          </a:xfrm>
+          <a:prstGeom prst="rect">
+            <a:avLst/>
+          </a:prstGeom>
+          <a:solidFill>
+            <a:srgbClr val="8A4FFF"/>
+          </a:solidFill>
+          <a:ln w="12700">
+            <a:solidFill>
+              <a:srgbClr val="8A4FFF">
+                <a:alpha val="0"/>
+              </a:srgbClr>
+            </a:solidFill>
+            <a:prstDash val="solid"/>
+          </a:ln>
+        </p:spPr>
+      </p:sp>
+      <p:sp>
+        <p:nvSpPr>
+          <p:cNvPr id="15" name="Shape 13"/>
+          <p:cNvSpPr/>
+          <p:nvPr/>
+        </p:nvSpPr>
+        <p:spPr>
+          <a:xfrm>
+            <a:off x="822960" y="2194560"/>
+            <a:ext cx="73152" cy="658368"/>
+          </a:xfrm>
+          <a:prstGeom prst="rect">
+            <a:avLst/>
+          </a:prstGeom>
+          <a:solidFill>
+            <a:srgbClr val="22D3EE"/>
+          </a:solidFill>
+          <a:ln w="12700">
+            <a:solidFill>
+              <a:srgbClr val="22D3EE">
+                <a:alpha val="0"/>
+              </a:srgbClr>
+            </a:solidFill>
+            <a:prstDash val="solid"/>
+          </a:ln>
+        </p:spPr>
+      </p:sp>
+      <p:sp>
+        <p:nvSpPr>
+          <p:cNvPr id="16" name="Shape 14"/>
+          <p:cNvSpPr/>
+          <p:nvPr/>
+        </p:nvSpPr>
+        <p:spPr>
+          <a:xfrm>
+            <a:off x="822960" y="2990088"/>
+            <a:ext cx="73152" cy="658368"/>
+          </a:xfrm>
+          <a:prstGeom prst="rect">
+            <a:avLst/>
+          </a:prstGeom>
+          <a:solidFill>
+            <a:srgbClr val="8A4FFF"/>
+          </a:solidFill>
+          <a:ln w="12700">
+            <a:solidFill>
+              <a:srgbClr val="8A4FFF">
+                <a:alpha val="0"/>
+              </a:srgbClr>
+            </a:solidFill>
+            <a:prstDash val="solid"/>
+          </a:ln>
+        </p:spPr>
+      </p:sp>
+      <p:sp>
+        <p:nvSpPr>
+          <p:cNvPr id="17" name="Shape 15"/>
+          <p:cNvSpPr/>
+          <p:nvPr/>
+        </p:nvSpPr>
+        <p:spPr>
+          <a:xfrm>
+            <a:off x="822960" y="3794760"/>
+            <a:ext cx="73152" cy="658368"/>
+          </a:xfrm>
+          <a:prstGeom prst="rect">
+            <a:avLst/>
+          </a:prstGeom>
+          <a:solidFill>
+            <a:srgbClr val="22D3EE"/>
+          </a:solidFill>
+          <a:ln w="12700">
+            <a:solidFill>
+              <a:srgbClr val="22D3EE">
+                <a:alpha val="0"/>
+              </a:srgbClr>
+            </a:solidFill>
+            <a:prstDash val="solid"/>
+          </a:ln>
+        </p:spPr>
+      </p:sp>
+      <p:sp>
+        <p:nvSpPr>
+          <p:cNvPr id="18" name="Shape 16"/>
+          <p:cNvSpPr/>
+          <p:nvPr/>
+        </p:nvSpPr>
+        <p:spPr>
+          <a:xfrm>
+            <a:off x="822960" y="4599432"/>
+            <a:ext cx="73152" cy="658368"/>
+          </a:xfrm>
+          <a:prstGeom prst="rect">
+            <a:avLst/>
+          </a:prstGeom>
+          <a:solidFill>
+            <a:srgbClr val="8A4FFF"/>
+          </a:solidFill>
+          <a:ln w="12700">
+            <a:solidFill>
+              <a:srgbClr val="8A4FFF">
+                <a:alpha val="0"/>
+              </a:srgbClr>
+            </a:solidFill>
+            <a:prstDash val="solid"/>
+          </a:ln>
+        </p:spPr>
+      </p:sp>
+      <p:sp>
+        <p:nvSpPr>
+          <p:cNvPr id="19" name="Shape 17"/>
+          <p:cNvSpPr/>
+          <p:nvPr/>
+        </p:nvSpPr>
+        <p:spPr>
+          <a:xfrm>
+            <a:off x="822960" y="5394960"/>
+            <a:ext cx="73152" cy="658368"/>
+          </a:xfrm>
+          <a:prstGeom prst="rect">
+            <a:avLst/>
+          </a:prstGeom>
+          <a:solidFill>
+            <a:srgbClr val="22D3EE"/>
+          </a:solidFill>
+          <a:ln w="12700">
+            <a:solidFill>
+              <a:srgbClr val="22D3EE">
+                <a:alpha val="0"/>
+              </a:srgbClr>
+            </a:solidFill>
+            <a:prstDash val="solid"/>
+          </a:ln>
+        </p:spPr>
+      </p:sp>
+      <p:sp>
+        <p:nvSpPr>
+          <p:cNvPr id="20" name="Shape 18"/>
+          <p:cNvSpPr/>
+          <p:nvPr/>
+        </p:nvSpPr>
+        <p:spPr>
+          <a:xfrm>
+            <a:off x="6272784" y="1389888"/>
+            <a:ext cx="73152" cy="658368"/>
+          </a:xfrm>
+          <a:prstGeom prst="rect">
+            <a:avLst/>
+          </a:prstGeom>
+          <a:solidFill>
+            <a:srgbClr val="8A4FFF"/>
+          </a:solidFill>
+          <a:ln w="12700">
+            <a:solidFill>
+              <a:srgbClr val="8A4FFF">
+                <a:alpha val="0"/>
+              </a:srgbClr>
+            </a:solidFill>
+            <a:prstDash val="solid"/>
+          </a:ln>
+        </p:spPr>
+      </p:sp>
+      <p:sp>
+        <p:nvSpPr>
+          <p:cNvPr id="21" name="Shape 19"/>
+          <p:cNvSpPr/>
+          <p:nvPr/>
+        </p:nvSpPr>
+        <p:spPr>
+          <a:xfrm>
+            <a:off x="6272784" y="2194560"/>
+            <a:ext cx="73152" cy="658368"/>
+          </a:xfrm>
+          <a:prstGeom prst="rect">
+            <a:avLst/>
+          </a:prstGeom>
+          <a:solidFill>
+            <a:srgbClr val="22D3EE"/>
+          </a:solidFill>
+          <a:ln w="12700">
+            <a:solidFill>
+              <a:srgbClr val="22D3EE">
+                <a:alpha val="0"/>
+              </a:srgbClr>
+            </a:solidFill>
+            <a:prstDash val="solid"/>
+          </a:ln>
+        </p:spPr>
+      </p:sp>
+      <p:sp>
+        <p:nvSpPr>
+          <p:cNvPr id="22" name="Shape 20"/>
+          <p:cNvSpPr/>
+          <p:nvPr/>
+        </p:nvSpPr>
+        <p:spPr>
+          <a:xfrm>
+            <a:off x="6272784" y="2990088"/>
+            <a:ext cx="73152" cy="658368"/>
+          </a:xfrm>
+          <a:prstGeom prst="rect">
+            <a:avLst/>
+          </a:prstGeom>
+          <a:solidFill>
+            <a:srgbClr val="8A4FFF"/>
+          </a:solidFill>
+          <a:ln w="12700">
+            <a:solidFill>
+              <a:srgbClr val="8A4FFF">
+                <a:alpha val="0"/>
+              </a:srgbClr>
+            </a:solidFill>
+            <a:prstDash val="solid"/>
+          </a:ln>
+        </p:spPr>
+      </p:sp>
+      <p:sp>
+        <p:nvSpPr>
+          <p:cNvPr id="23" name="Shape 21"/>
+          <p:cNvSpPr/>
+          <p:nvPr/>
+        </p:nvSpPr>
+        <p:spPr>
+          <a:xfrm>
+            <a:off x="6272784" y="3794760"/>
+            <a:ext cx="73152" cy="658368"/>
+          </a:xfrm>
+          <a:prstGeom prst="rect">
+            <a:avLst/>
+          </a:prstGeom>
+          <a:solidFill>
+            <a:srgbClr val="22D3EE"/>
+          </a:solidFill>
+          <a:ln w="12700">
+            <a:solidFill>
+              <a:srgbClr val="22D3EE">
+                <a:alpha val="0"/>
+              </a:srgbClr>
+            </a:solidFill>
+            <a:prstDash val="solid"/>
+          </a:ln>
+        </p:spPr>
+      </p:sp>
+      <p:sp>
+        <p:nvSpPr>
+          <p:cNvPr id="24" name="Shape 22"/>
+          <p:cNvSpPr/>
+          <p:nvPr/>
+        </p:nvSpPr>
+        <p:spPr>
+          <a:xfrm>
+            <a:off x="6272784" y="4599432"/>
+            <a:ext cx="73152" cy="658368"/>
+          </a:xfrm>
+          <a:prstGeom prst="rect">
+            <a:avLst/>
+          </a:prstGeom>
+          <a:solidFill>
+            <a:srgbClr val="8A4FFF"/>
+          </a:solidFill>
+          <a:ln w="12700">
+            <a:solidFill>
+              <a:srgbClr val="8A4FFF">
+                <a:alpha val="0"/>
+              </a:srgbClr>
+            </a:solidFill>
+            <a:prstDash val="solid"/>
+          </a:ln>
+        </p:spPr>
+      </p:sp>
+      <p:sp>
+        <p:nvSpPr>
+          <p:cNvPr id="25" name="Shape 23"/>
+          <p:cNvSpPr/>
+          <p:nvPr/>
+        </p:nvSpPr>
+        <p:spPr>
+          <a:xfrm>
+            <a:off x="6272784" y="5394960"/>
+            <a:ext cx="73152" cy="658368"/>
+          </a:xfrm>
+          <a:prstGeom prst="rect">
+            <a:avLst/>
+          </a:prstGeom>
+          <a:solidFill>
+            <a:srgbClr val="22D3EE"/>
+          </a:solidFill>
+          <a:ln w="12700">
+            <a:solidFill>
+              <a:srgbClr val="22D3EE">
+                <a:alpha val="0"/>
+              </a:srgbClr>
+            </a:solidFill>
+            <a:prstDash val="solid"/>
+          </a:ln>
+        </p:spPr>
+      </p:sp>
+      <p:sp>
+        <p:nvSpPr>
+          <p:cNvPr id="26" name="Text 24"/>
           <p:cNvSpPr txBox="1"/>
           <p:nvPr/>
         </p:nvSpPr>
@@ -13275,14 +13684,14 @@
       </p:sp>
       <p:sp>
         <p:nvSpPr>
-          <p:cNvPr id="13" name="Text 11"/>
+          <p:cNvPr id="27" name="Text 25"/>
           <p:cNvSpPr txBox="1"/>
           <p:nvPr/>
         </p:nvSpPr>
         <p:spPr>
           <a:xfrm>
-            <a:off x="987552" y="1572768"/>
-            <a:ext cx="10094976" cy="355092"/>
+            <a:off x="1042416" y="1481328"/>
+            <a:ext cx="4645152" cy="475488"/>
           </a:xfrm>
           <a:prstGeom prst="rect">
             <a:avLst/>
@@ -13294,14 +13703,14 @@
           <a:bodyPr wrap="square" lIns="0" tIns="25400" rIns="25400" bIns="0" rtlCol="0" anchor="ctr"/>
           <a:lstStyle/>
           <a:p>
-            <a:pPr algn="l" indent="0" marL="0">
+            <a:pPr algn="ctr" indent="0" marL="0">
               <a:lnSpc>
                 <a:spcPct val="120000"/>
               </a:lnSpc>
               <a:buNone/>
             </a:pPr>
             <a:r>
-              <a:rPr lang="en-US" sz="2200" dirty="0">
+              <a:rPr lang="en-US" sz="1800" dirty="0">
                 <a:solidFill>
                   <a:srgbClr val="F8FAFC"/>
                 </a:solidFill>
@@ -13309,22 +13718,22 @@
                 <a:ea typeface="Pretendard" pitchFamily="34" charset="-122"/>
                 <a:cs typeface="Pretendard" pitchFamily="34" charset="-120"/>
               </a:rPr>
-              <a:t>Preview Purpose</a:t>
+              <a:t>01  Preview Purpose</a:t>
             </a:r>
-            <a:endParaRPr lang="en-US" sz="2200" dirty="0"/>
+            <a:endParaRPr lang="en-US" sz="1800" dirty="0"/>
           </a:p>
         </p:txBody>
       </p:sp>
       <p:sp>
         <p:nvSpPr>
-          <p:cNvPr id="14" name="Text 12"/>
+          <p:cNvPr id="28" name="Text 26"/>
           <p:cNvSpPr txBox="1"/>
           <p:nvPr/>
         </p:nvSpPr>
         <p:spPr>
           <a:xfrm>
-            <a:off x="987552" y="1927860"/>
-            <a:ext cx="10094976" cy="355092"/>
+            <a:off x="1042416" y="2286000"/>
+            <a:ext cx="4645152" cy="475488"/>
           </a:xfrm>
           <a:prstGeom prst="rect">
             <a:avLst/>
@@ -13336,14 +13745,14 @@
           <a:bodyPr wrap="square" lIns="0" tIns="25400" rIns="25400" bIns="0" rtlCol="0" anchor="ctr"/>
           <a:lstStyle/>
           <a:p>
-            <a:pPr algn="l" indent="0" marL="0">
+            <a:pPr algn="ctr" indent="0" marL="0">
               <a:lnSpc>
                 <a:spcPct val="120000"/>
               </a:lnSpc>
               <a:buNone/>
             </a:pPr>
             <a:r>
-              <a:rPr lang="en-US" sz="2200" dirty="0">
+              <a:rPr lang="en-US" sz="1800" dirty="0">
                 <a:solidFill>
                   <a:srgbClr val="F8FAFC"/>
                 </a:solidFill>
@@ -13351,22 +13760,22 @@
                 <a:ea typeface="Pretendard" pitchFamily="34" charset="-122"/>
                 <a:cs typeface="Pretendard" pitchFamily="34" charset="-120"/>
               </a:rPr>
-              <a:t>Composition Contract</a:t>
+              <a:t>02  Composition Contract</a:t>
             </a:r>
-            <a:endParaRPr lang="en-US" sz="2200" dirty="0"/>
+            <a:endParaRPr lang="en-US" sz="1800" dirty="0"/>
           </a:p>
         </p:txBody>
       </p:sp>
       <p:sp>
         <p:nvSpPr>
-          <p:cNvPr id="15" name="Text 13"/>
+          <p:cNvPr id="29" name="Text 27"/>
           <p:cNvSpPr txBox="1"/>
           <p:nvPr/>
         </p:nvSpPr>
         <p:spPr>
           <a:xfrm>
-            <a:off x="987552" y="2282952"/>
-            <a:ext cx="10094976" cy="355092"/>
+            <a:off x="1042416" y="3081528"/>
+            <a:ext cx="4645152" cy="475488"/>
           </a:xfrm>
           <a:prstGeom prst="rect">
             <a:avLst/>
@@ -13378,14 +13787,14 @@
           <a:bodyPr wrap="square" lIns="0" tIns="25400" rIns="25400" bIns="0" rtlCol="0" anchor="ctr"/>
           <a:lstStyle/>
           <a:p>
-            <a:pPr algn="l" indent="0" marL="0">
+            <a:pPr algn="ctr" indent="0" marL="0">
               <a:lnSpc>
                 <a:spcPct val="120000"/>
               </a:lnSpc>
               <a:buNone/>
             </a:pPr>
             <a:r>
-              <a:rPr lang="en-US" sz="2200" dirty="0">
+              <a:rPr lang="en-US" sz="1800" dirty="0">
                 <a:solidFill>
                   <a:srgbClr val="F8FAFC"/>
                 </a:solidFill>
@@ -13393,22 +13802,22 @@
                 <a:ea typeface="Pretendard" pitchFamily="34" charset="-122"/>
                 <a:cs typeface="Pretendard" pitchFamily="34" charset="-120"/>
               </a:rPr>
-              <a:t>Style Families</a:t>
+              <a:t>03  Style Families</a:t>
             </a:r>
-            <a:endParaRPr lang="en-US" sz="2200" dirty="0"/>
+            <a:endParaRPr lang="en-US" sz="1800" dirty="0"/>
           </a:p>
         </p:txBody>
       </p:sp>
       <p:sp>
         <p:nvSpPr>
-          <p:cNvPr id="16" name="Text 14"/>
+          <p:cNvPr id="30" name="Text 28"/>
           <p:cNvSpPr txBox="1"/>
           <p:nvPr/>
         </p:nvSpPr>
         <p:spPr>
           <a:xfrm>
-            <a:off x="987552" y="2638044"/>
-            <a:ext cx="10094976" cy="355092"/>
+            <a:off x="1042416" y="3886200"/>
+            <a:ext cx="4645152" cy="475488"/>
           </a:xfrm>
           <a:prstGeom prst="rect">
             <a:avLst/>
@@ -13420,14 +13829,14 @@
           <a:bodyPr wrap="square" lIns="0" tIns="25400" rIns="25400" bIns="0" rtlCol="0" anchor="ctr"/>
           <a:lstStyle/>
           <a:p>
-            <a:pPr algn="l" indent="0" marL="0">
+            <a:pPr algn="ctr" indent="0" marL="0">
               <a:lnSpc>
                 <a:spcPct val="120000"/>
               </a:lnSpc>
               <a:buNone/>
             </a:pPr>
             <a:r>
-              <a:rPr lang="en-US" sz="2200" dirty="0">
+              <a:rPr lang="en-US" sz="1800" dirty="0">
                 <a:solidFill>
                   <a:srgbClr val="F8FAFC"/>
                 </a:solidFill>
@@ -13435,22 +13844,22 @@
                 <a:ea typeface="Pretendard" pitchFamily="34" charset="-122"/>
                 <a:cs typeface="Pretendard" pitchFamily="34" charset="-120"/>
               </a:rPr>
-              <a:t>Semantic Blocks</a:t>
+              <a:t>04  Semantic Blocks</a:t>
             </a:r>
-            <a:endParaRPr lang="en-US" sz="2200" dirty="0"/>
+            <a:endParaRPr lang="en-US" sz="1800" dirty="0"/>
           </a:p>
         </p:txBody>
       </p:sp>
       <p:sp>
         <p:nvSpPr>
-          <p:cNvPr id="17" name="Text 15"/>
+          <p:cNvPr id="31" name="Text 29"/>
           <p:cNvSpPr txBox="1"/>
           <p:nvPr/>
         </p:nvSpPr>
         <p:spPr>
           <a:xfrm>
-            <a:off x="987552" y="2993136"/>
-            <a:ext cx="10094976" cy="355092"/>
+            <a:off x="1042416" y="4690872"/>
+            <a:ext cx="4645152" cy="475488"/>
           </a:xfrm>
           <a:prstGeom prst="rect">
             <a:avLst/>
@@ -13462,14 +13871,14 @@
           <a:bodyPr wrap="square" lIns="0" tIns="25400" rIns="25400" bIns="0" rtlCol="0" anchor="ctr"/>
           <a:lstStyle/>
           <a:p>
-            <a:pPr algn="l" indent="0" marL="0">
+            <a:pPr algn="ctr" indent="0" marL="0">
               <a:lnSpc>
                 <a:spcPct val="120000"/>
               </a:lnSpc>
               <a:buNone/>
             </a:pPr>
             <a:r>
-              <a:rPr lang="en-US" sz="2200" dirty="0">
+              <a:rPr lang="en-US" sz="1800" dirty="0">
                 <a:solidFill>
                   <a:srgbClr val="F8FAFC"/>
                 </a:solidFill>
@@ -13477,22 +13886,22 @@
                 <a:ea typeface="Pretendard" pitchFamily="34" charset="-122"/>
                 <a:cs typeface="Pretendard" pitchFamily="34" charset="-120"/>
               </a:rPr>
-              <a:t>Pipeline Diagram</a:t>
+              <a:t>05  Pipeline Diagram</a:t>
             </a:r>
-            <a:endParaRPr lang="en-US" sz="2200" dirty="0"/>
+            <a:endParaRPr lang="en-US" sz="1800" dirty="0"/>
           </a:p>
         </p:txBody>
       </p:sp>
       <p:sp>
         <p:nvSpPr>
-          <p:cNvPr id="18" name="Text 16"/>
+          <p:cNvPr id="32" name="Text 30"/>
           <p:cNvSpPr txBox="1"/>
           <p:nvPr/>
         </p:nvSpPr>
         <p:spPr>
           <a:xfrm>
-            <a:off x="987552" y="3348228"/>
-            <a:ext cx="10094976" cy="355092"/>
+            <a:off x="1042416" y="5486400"/>
+            <a:ext cx="4645152" cy="475488"/>
           </a:xfrm>
           <a:prstGeom prst="rect">
             <a:avLst/>
@@ -13504,14 +13913,14 @@
           <a:bodyPr wrap="square" lIns="0" tIns="25400" rIns="25400" bIns="0" rtlCol="0" anchor="ctr"/>
           <a:lstStyle/>
           <a:p>
-            <a:pPr algn="l" indent="0" marL="0">
+            <a:pPr algn="ctr" indent="0" marL="0">
               <a:lnSpc>
                 <a:spcPct val="120000"/>
               </a:lnSpc>
               <a:buNone/>
             </a:pPr>
             <a:r>
-              <a:rPr lang="en-US" sz="2200" dirty="0">
+              <a:rPr lang="en-US" sz="1800" dirty="0">
                 <a:solidFill>
                   <a:srgbClr val="F8FAFC"/>
                 </a:solidFill>
@@ -13519,22 +13928,22 @@
                 <a:ea typeface="Pretendard" pitchFamily="34" charset="-122"/>
                 <a:cs typeface="Pretendard" pitchFamily="34" charset="-120"/>
               </a:rPr>
-              <a:t>Table Coherence</a:t>
+              <a:t>06  Table Coherence</a:t>
             </a:r>
-            <a:endParaRPr lang="en-US" sz="2200" dirty="0"/>
+            <a:endParaRPr lang="en-US" sz="1800" dirty="0"/>
           </a:p>
         </p:txBody>
       </p:sp>
       <p:sp>
         <p:nvSpPr>
-          <p:cNvPr id="19" name="Text 17"/>
+          <p:cNvPr id="33" name="Text 31"/>
           <p:cNvSpPr txBox="1"/>
           <p:nvPr/>
         </p:nvSpPr>
         <p:spPr>
           <a:xfrm>
-            <a:off x="987552" y="3703320"/>
-            <a:ext cx="10094976" cy="355092"/>
+            <a:off x="6492240" y="1481328"/>
+            <a:ext cx="4645152" cy="475488"/>
           </a:xfrm>
           <a:prstGeom prst="rect">
             <a:avLst/>
@@ -13546,14 +13955,14 @@
           <a:bodyPr wrap="square" lIns="0" tIns="25400" rIns="25400" bIns="0" rtlCol="0" anchor="ctr"/>
           <a:lstStyle/>
           <a:p>
-            <a:pPr algn="l" indent="0" marL="0">
+            <a:pPr algn="ctr" indent="0" marL="0">
               <a:lnSpc>
                 <a:spcPct val="120000"/>
               </a:lnSpc>
               <a:buNone/>
             </a:pPr>
             <a:r>
-              <a:rPr lang="en-US" sz="2200" dirty="0">
+              <a:rPr lang="en-US" sz="1800" dirty="0">
                 <a:solidFill>
                   <a:srgbClr val="F8FAFC"/>
                 </a:solidFill>
@@ -13561,22 +13970,22 @@
                 <a:ea typeface="Pretendard" pitchFamily="34" charset="-122"/>
                 <a:cs typeface="Pretendard" pitchFamily="34" charset="-120"/>
               </a:rPr>
-              <a:t>Chart and Table Pair</a:t>
+              <a:t>07  Chart and Table Pair</a:t>
             </a:r>
-            <a:endParaRPr lang="en-US" sz="2200" dirty="0"/>
+            <a:endParaRPr lang="en-US" sz="1800" dirty="0"/>
           </a:p>
         </p:txBody>
       </p:sp>
       <p:sp>
         <p:nvSpPr>
-          <p:cNvPr id="20" name="Text 18"/>
+          <p:cNvPr id="34" name="Text 32"/>
           <p:cNvSpPr txBox="1"/>
           <p:nvPr/>
         </p:nvSpPr>
         <p:spPr>
           <a:xfrm>
-            <a:off x="987552" y="4058412"/>
-            <a:ext cx="10094976" cy="355092"/>
+            <a:off x="6492240" y="2286000"/>
+            <a:ext cx="4645152" cy="475488"/>
           </a:xfrm>
           <a:prstGeom prst="rect">
             <a:avLst/>
@@ -13588,14 +13997,14 @@
           <a:bodyPr wrap="square" lIns="0" tIns="25400" rIns="25400" bIns="0" rtlCol="0" anchor="ctr"/>
           <a:lstStyle/>
           <a:p>
-            <a:pPr algn="l" indent="0" marL="0">
+            <a:pPr algn="ctr" indent="0" marL="0">
               <a:lnSpc>
                 <a:spcPct val="120000"/>
               </a:lnSpc>
               <a:buNone/>
             </a:pPr>
             <a:r>
-              <a:rPr lang="en-US" sz="2200" dirty="0">
+              <a:rPr lang="en-US" sz="1800" dirty="0">
                 <a:solidFill>
                   <a:srgbClr val="F8FAFC"/>
                 </a:solidFill>
@@ -13603,22 +14012,22 @@
                 <a:ea typeface="Pretendard" pitchFamily="34" charset="-122"/>
                 <a:cs typeface="Pretendard" pitchFamily="34" charset="-120"/>
               </a:rPr>
-              <a:t>Editable Proof Objects</a:t>
+              <a:t>08  Editable Proof Objects</a:t>
             </a:r>
-            <a:endParaRPr lang="en-US" sz="2200" dirty="0"/>
+            <a:endParaRPr lang="en-US" sz="1800" dirty="0"/>
           </a:p>
         </p:txBody>
       </p:sp>
       <p:sp>
         <p:nvSpPr>
-          <p:cNvPr id="21" name="Text 19"/>
+          <p:cNvPr id="35" name="Text 33"/>
           <p:cNvSpPr txBox="1"/>
           <p:nvPr/>
         </p:nvSpPr>
         <p:spPr>
           <a:xfrm>
-            <a:off x="987552" y="4413504"/>
-            <a:ext cx="10094976" cy="355092"/>
+            <a:off x="6492240" y="3081528"/>
+            <a:ext cx="4645152" cy="475488"/>
           </a:xfrm>
           <a:prstGeom prst="rect">
             <a:avLst/>
@@ -13630,14 +14039,14 @@
           <a:bodyPr wrap="square" lIns="0" tIns="25400" rIns="25400" bIns="0" rtlCol="0" anchor="ctr"/>
           <a:lstStyle/>
           <a:p>
-            <a:pPr algn="l" indent="0" marL="0">
+            <a:pPr algn="ctr" indent="0" marL="0">
               <a:lnSpc>
                 <a:spcPct val="120000"/>
               </a:lnSpc>
               <a:buNone/>
             </a:pPr>
             <a:r>
-              <a:rPr lang="en-US" sz="2200" dirty="0">
+              <a:rPr lang="en-US" sz="1800" dirty="0">
                 <a:solidFill>
                   <a:srgbClr val="F8FAFC"/>
                 </a:solidFill>
@@ -13645,22 +14054,22 @@
                 <a:ea typeface="Pretendard" pitchFamily="34" charset="-122"/>
                 <a:cs typeface="Pretendard" pitchFamily="34" charset="-120"/>
               </a:rPr>
-              <a:t>Object Shape Grammar</a:t>
+              <a:t>09  Object Shape Grammar</a:t>
             </a:r>
-            <a:endParaRPr lang="en-US" sz="2200" dirty="0"/>
+            <a:endParaRPr lang="en-US" sz="1800" dirty="0"/>
           </a:p>
         </p:txBody>
       </p:sp>
       <p:sp>
         <p:nvSpPr>
-          <p:cNvPr id="22" name="Text 20"/>
+          <p:cNvPr id="36" name="Text 34"/>
           <p:cNvSpPr txBox="1"/>
           <p:nvPr/>
         </p:nvSpPr>
         <p:spPr>
           <a:xfrm>
-            <a:off x="987552" y="4768596"/>
-            <a:ext cx="10094976" cy="355092"/>
+            <a:off x="6492240" y="3886200"/>
+            <a:ext cx="4645152" cy="475488"/>
           </a:xfrm>
           <a:prstGeom prst="rect">
             <a:avLst/>
@@ -13672,14 +14081,14 @@
           <a:bodyPr wrap="square" lIns="0" tIns="25400" rIns="25400" bIns="0" rtlCol="0" anchor="ctr"/>
           <a:lstStyle/>
           <a:p>
-            <a:pPr algn="l" indent="0" marL="0">
+            <a:pPr algn="ctr" indent="0" marL="0">
               <a:lnSpc>
                 <a:spcPct val="120000"/>
               </a:lnSpc>
               <a:buNone/>
             </a:pPr>
             <a:r>
-              <a:rPr lang="en-US" sz="2200" dirty="0">
+              <a:rPr lang="en-US" sz="1800" dirty="0">
                 <a:solidFill>
                   <a:srgbClr val="F8FAFC"/>
                 </a:solidFill>
@@ -13687,22 +14096,22 @@
                 <a:ea typeface="Pretendard" pitchFamily="34" charset="-122"/>
                 <a:cs typeface="Pretendard" pitchFamily="34" charset="-120"/>
               </a:rPr>
-              <a:t>Icon and Text Aside</a:t>
+              <a:t>10  Icon and Text Aside</a:t>
             </a:r>
-            <a:endParaRPr lang="en-US" sz="2200" dirty="0"/>
+            <a:endParaRPr lang="en-US" sz="1800" dirty="0"/>
           </a:p>
         </p:txBody>
       </p:sp>
       <p:sp>
         <p:nvSpPr>
-          <p:cNvPr id="23" name="Text 21"/>
+          <p:cNvPr id="37" name="Text 35"/>
           <p:cNvSpPr txBox="1"/>
           <p:nvPr/>
         </p:nvSpPr>
         <p:spPr>
           <a:xfrm>
-            <a:off x="987552" y="5123688"/>
-            <a:ext cx="10094976" cy="355092"/>
+            <a:off x="6492240" y="4690872"/>
+            <a:ext cx="4645152" cy="475488"/>
           </a:xfrm>
           <a:prstGeom prst="rect">
             <a:avLst/>
@@ -13714,14 +14123,14 @@
           <a:bodyPr wrap="square" lIns="0" tIns="25400" rIns="25400" bIns="0" rtlCol="0" anchor="ctr"/>
           <a:lstStyle/>
           <a:p>
-            <a:pPr algn="l" indent="0" marL="0">
+            <a:pPr algn="ctr" indent="0" marL="0">
               <a:lnSpc>
                 <a:spcPct val="120000"/>
               </a:lnSpc>
               <a:buNone/>
             </a:pPr>
             <a:r>
-              <a:rPr lang="en-US" sz="2200" dirty="0">
+              <a:rPr lang="en-US" sz="1800" dirty="0">
                 <a:solidFill>
                   <a:srgbClr val="F8FAFC"/>
                 </a:solidFill>
@@ -13729,22 +14138,22 @@
                 <a:ea typeface="Pretendard" pitchFamily="34" charset="-122"/>
                 <a:cs typeface="Pretendard" pitchFamily="34" charset="-120"/>
               </a:rPr>
-              <a:t>Overflow Guard</a:t>
+              <a:t>11  Overflow Guard</a:t>
             </a:r>
-            <a:endParaRPr lang="en-US" sz="2200" dirty="0"/>
+            <a:endParaRPr lang="en-US" sz="1800" dirty="0"/>
           </a:p>
         </p:txBody>
       </p:sp>
       <p:sp>
         <p:nvSpPr>
-          <p:cNvPr id="24" name="Text 22"/>
+          <p:cNvPr id="38" name="Text 36"/>
           <p:cNvSpPr txBox="1"/>
           <p:nvPr/>
         </p:nvSpPr>
         <p:spPr>
           <a:xfrm>
-            <a:off x="987552" y="5478780"/>
-            <a:ext cx="10094976" cy="355092"/>
+            <a:off x="6492240" y="5486400"/>
+            <a:ext cx="4645152" cy="475488"/>
           </a:xfrm>
           <a:prstGeom prst="rect">
             <a:avLst/>
@@ -13756,14 +14165,14 @@
           <a:bodyPr wrap="square" lIns="0" tIns="25400" rIns="25400" bIns="0" rtlCol="0" anchor="ctr"/>
           <a:lstStyle/>
           <a:p>
-            <a:pPr algn="l" indent="0" marL="0">
+            <a:pPr algn="ctr" indent="0" marL="0">
               <a:lnSpc>
                 <a:spcPct val="120000"/>
               </a:lnSpc>
               <a:buNone/>
             </a:pPr>
             <a:r>
-              <a:rPr lang="en-US" sz="2200" dirty="0">
+              <a:rPr lang="en-US" sz="1800" dirty="0">
                 <a:solidFill>
                   <a:srgbClr val="F8FAFC"/>
                 </a:solidFill>
@@ -13771,9 +14180,9 @@
                 <a:ea typeface="Pretendard" pitchFamily="34" charset="-122"/>
                 <a:cs typeface="Pretendard" pitchFamily="34" charset="-120"/>
               </a:rPr>
-              <a:t>Actions Output Review</a:t>
+              <a:t>12  Actions Output Review</a:t>
             </a:r>
-            <a:endParaRPr lang="en-US" sz="2200" dirty="0"/>
+            <a:endParaRPr lang="en-US" sz="1800" dirty="0"/>
           </a:p>
         </p:txBody>
       </p:sp>
@@ -14721,8 +15130,37 @@
         </p:nvSpPr>
         <p:spPr>
           <a:xfrm>
-            <a:off x="914400" y="1417320"/>
-            <a:ext cx="73152" cy="868680"/>
+            <a:off x="786384" y="1956816"/>
+            <a:ext cx="32004" cy="3483864"/>
+          </a:xfrm>
+          <a:prstGeom prst="rect">
+            <a:avLst/>
+          </a:prstGeom>
+          <a:solidFill>
+            <a:srgbClr val="22D3EE">
+              <a:alpha val="80000"/>
+            </a:srgbClr>
+          </a:solidFill>
+          <a:ln w="12700">
+            <a:solidFill>
+              <a:srgbClr val="22D3EE">
+                <a:alpha val="0"/>
+              </a:srgbClr>
+            </a:solidFill>
+            <a:prstDash val="solid"/>
+          </a:ln>
+        </p:spPr>
+      </p:sp>
+      <p:sp>
+        <p:nvSpPr>
+          <p:cNvPr id="12" name="Shape 10"/>
+          <p:cNvSpPr/>
+          <p:nvPr/>
+        </p:nvSpPr>
+        <p:spPr>
+          <a:xfrm>
+            <a:off x="914400" y="1865376"/>
+            <a:ext cx="73152" cy="1024128"/>
           </a:xfrm>
           <a:prstGeom prst="rect">
             <a:avLst/>
@@ -14742,14 +15180,14 @@
       </p:sp>
       <p:sp>
         <p:nvSpPr>
-          <p:cNvPr id="12" name="Shape 10"/>
-          <p:cNvSpPr/>
-          <p:nvPr/>
-        </p:nvSpPr>
-        <p:spPr>
-          <a:xfrm>
-            <a:off x="914400" y="2560320"/>
-            <a:ext cx="73152" cy="868680"/>
+          <p:cNvPr id="13" name="Shape 11"/>
+          <p:cNvSpPr/>
+          <p:nvPr/>
+        </p:nvSpPr>
+        <p:spPr>
+          <a:xfrm>
+            <a:off x="914400" y="3191256"/>
+            <a:ext cx="73152" cy="1024128"/>
           </a:xfrm>
           <a:prstGeom prst="rect">
             <a:avLst/>
@@ -14769,14 +15207,14 @@
       </p:sp>
       <p:sp>
         <p:nvSpPr>
-          <p:cNvPr id="13" name="Shape 11"/>
-          <p:cNvSpPr/>
-          <p:nvPr/>
-        </p:nvSpPr>
-        <p:spPr>
-          <a:xfrm>
-            <a:off x="914400" y="3703320"/>
-            <a:ext cx="73152" cy="868680"/>
+          <p:cNvPr id="14" name="Shape 12"/>
+          <p:cNvSpPr/>
+          <p:nvPr/>
+        </p:nvSpPr>
+        <p:spPr>
+          <a:xfrm>
+            <a:off x="914400" y="4507992"/>
+            <a:ext cx="73152" cy="1024128"/>
           </a:xfrm>
           <a:prstGeom prst="rect">
             <a:avLst/>
@@ -14796,7 +15234,7 @@
       </p:sp>
       <p:pic>
         <p:nvPicPr>
-          <p:cNvPr id="14" name="Image 0" descr="preencoded.png">    </p:cNvPr>
+          <p:cNvPr id="15" name="Image 0" descr="preencoded.png">    </p:cNvPr>
           <p:cNvPicPr>
             <a:picLocks noChangeAspect="1"/>
           </p:cNvPicPr>
@@ -14816,8 +15254,8 @@
         </p:blipFill>
         <p:spPr>
           <a:xfrm>
-            <a:off x="914400" y="1417320"/>
-            <a:ext cx="10241280" cy="868680"/>
+            <a:off x="914400" y="1865376"/>
+            <a:ext cx="10241280" cy="1024128"/>
           </a:xfrm>
           <a:prstGeom prst="rect">
             <a:avLst/>
@@ -14826,14 +15264,14 @@
       </p:pic>
       <p:sp>
         <p:nvSpPr>
-          <p:cNvPr id="15" name="Shape 12"/>
-          <p:cNvSpPr/>
-          <p:nvPr/>
-        </p:nvSpPr>
-        <p:spPr>
-          <a:xfrm>
-            <a:off x="914400" y="1417320"/>
-            <a:ext cx="10241280" cy="868680"/>
+          <p:cNvPr id="16" name="Shape 13"/>
+          <p:cNvSpPr/>
+          <p:nvPr/>
+        </p:nvSpPr>
+        <p:spPr>
+          <a:xfrm>
+            <a:off x="914400" y="1865376"/>
+            <a:ext cx="10241280" cy="1024128"/>
           </a:xfrm>
           <a:prstGeom prst="rect">
             <a:avLst/>
@@ -14867,7 +15305,7 @@
       </p:sp>
       <p:pic>
         <p:nvPicPr>
-          <p:cNvPr id="16" name="Image 1" descr="preencoded.png">    </p:cNvPr>
+          <p:cNvPr id="17" name="Image 1" descr="preencoded.png">    </p:cNvPr>
           <p:cNvPicPr>
             <a:picLocks noChangeAspect="1"/>
           </p:cNvPicPr>
@@ -14887,8 +15325,8 @@
         </p:blipFill>
         <p:spPr>
           <a:xfrm>
-            <a:off x="914400" y="2560320"/>
-            <a:ext cx="10241280" cy="868680"/>
+            <a:off x="914400" y="3191256"/>
+            <a:ext cx="10241280" cy="1024128"/>
           </a:xfrm>
           <a:prstGeom prst="rect">
             <a:avLst/>
@@ -14897,14 +15335,14 @@
       </p:pic>
       <p:sp>
         <p:nvSpPr>
-          <p:cNvPr id="17" name="Shape 13"/>
-          <p:cNvSpPr/>
-          <p:nvPr/>
-        </p:nvSpPr>
-        <p:spPr>
-          <a:xfrm>
-            <a:off x="914400" y="2560320"/>
-            <a:ext cx="10241280" cy="868680"/>
+          <p:cNvPr id="18" name="Shape 14"/>
+          <p:cNvSpPr/>
+          <p:nvPr/>
+        </p:nvSpPr>
+        <p:spPr>
+          <a:xfrm>
+            <a:off x="914400" y="3191256"/>
+            <a:ext cx="10241280" cy="1024128"/>
           </a:xfrm>
           <a:prstGeom prst="rect">
             <a:avLst/>
@@ -14938,7 +15376,7 @@
       </p:sp>
       <p:pic>
         <p:nvPicPr>
-          <p:cNvPr id="18" name="Image 2" descr="preencoded.png">    </p:cNvPr>
+          <p:cNvPr id="19" name="Image 2" descr="preencoded.png">    </p:cNvPr>
           <p:cNvPicPr>
             <a:picLocks noChangeAspect="1"/>
           </p:cNvPicPr>
@@ -14958,8 +15396,8 @@
         </p:blipFill>
         <p:spPr>
           <a:xfrm>
-            <a:off x="914400" y="3703320"/>
-            <a:ext cx="10241280" cy="868680"/>
+            <a:off x="914400" y="4507992"/>
+            <a:ext cx="10241280" cy="1024128"/>
           </a:xfrm>
           <a:prstGeom prst="rect">
             <a:avLst/>
@@ -14968,14 +15406,14 @@
       </p:pic>
       <p:sp>
         <p:nvSpPr>
-          <p:cNvPr id="19" name="Shape 14"/>
-          <p:cNvSpPr/>
-          <p:nvPr/>
-        </p:nvSpPr>
-        <p:spPr>
-          <a:xfrm>
-            <a:off x="914400" y="3703320"/>
-            <a:ext cx="10241280" cy="868680"/>
+          <p:cNvPr id="20" name="Shape 15"/>
+          <p:cNvSpPr/>
+          <p:nvPr/>
+        </p:nvSpPr>
+        <p:spPr>
+          <a:xfrm>
+            <a:off x="914400" y="4507992"/>
+            <a:ext cx="10241280" cy="1024128"/>
           </a:xfrm>
           <a:prstGeom prst="rect">
             <a:avLst/>
@@ -15009,7 +15447,7 @@
       </p:sp>
       <p:sp>
         <p:nvSpPr>
-          <p:cNvPr id="20" name="Text 15"/>
+          <p:cNvPr id="21" name="Text 16"/>
           <p:cNvSpPr txBox="1"/>
           <p:nvPr/>
         </p:nvSpPr>
@@ -15051,18 +15489,18 @@
       </p:sp>
       <p:sp>
         <p:nvSpPr>
-          <p:cNvPr id="21" name="Shape 16"/>
-          <p:cNvSpPr/>
-          <p:nvPr/>
-        </p:nvSpPr>
-        <p:spPr>
-          <a:xfrm>
-            <a:off x="1097280" y="1623060"/>
-            <a:ext cx="457200" cy="457200"/>
+          <p:cNvPr id="22" name="Shape 17"/>
+          <p:cNvSpPr/>
+          <p:nvPr/>
+        </p:nvSpPr>
+        <p:spPr>
+          <a:xfrm>
+            <a:off x="1097280" y="2140428"/>
+            <a:ext cx="474025" cy="474025"/>
           </a:xfrm>
           <a:prstGeom prst="roundRect">
             <a:avLst>
-              <a:gd name="adj" fmla="val 8000"/>
+              <a:gd name="adj" fmla="val 7716"/>
             </a:avLst>
           </a:prstGeom>
           <a:solidFill>
@@ -15078,7 +15516,7 @@
       </p:sp>
       <p:pic>
         <p:nvPicPr>
-          <p:cNvPr id="22" name="Image 3" descr="flow icon from tabler-icons (MIT)">    </p:cNvPr>
+          <p:cNvPr id="23" name="Image 3" descr="flow icon from tabler-icons (MIT)">    </p:cNvPr>
           <p:cNvPicPr>
             <a:picLocks noChangeAspect="1"/>
           </p:cNvPicPr>
@@ -15098,8 +15536,8 @@
         </p:blipFill>
         <p:spPr>
           <a:xfrm>
-            <a:off x="1170432" y="1696212"/>
-            <a:ext cx="310896" cy="310896"/>
+            <a:off x="1170432" y="2213580"/>
+            <a:ext cx="327721" cy="327721"/>
           </a:xfrm>
           <a:prstGeom prst="rect">
             <a:avLst/>
@@ -15108,14 +15546,14 @@
       </p:pic>
       <p:sp>
         <p:nvSpPr>
-          <p:cNvPr id="23" name="Text 17"/>
+          <p:cNvPr id="24" name="Text 18"/>
           <p:cNvSpPr txBox="1"/>
           <p:nvPr/>
         </p:nvSpPr>
         <p:spPr>
           <a:xfrm>
-            <a:off x="1682496" y="1508760"/>
-            <a:ext cx="9272016" cy="685800"/>
+            <a:off x="1699321" y="1957548"/>
+            <a:ext cx="9255191" cy="839785"/>
           </a:xfrm>
           <a:prstGeom prst="rect">
             <a:avLst/>
@@ -15167,18 +15605,18 @@
       </p:sp>
       <p:sp>
         <p:nvSpPr>
-          <p:cNvPr id="24" name="Shape 18"/>
-          <p:cNvSpPr/>
-          <p:nvPr/>
-        </p:nvSpPr>
-        <p:spPr>
-          <a:xfrm>
-            <a:off x="1097280" y="2766060"/>
-            <a:ext cx="457200" cy="457200"/>
+          <p:cNvPr id="25" name="Shape 19"/>
+          <p:cNvSpPr/>
+          <p:nvPr/>
+        </p:nvSpPr>
+        <p:spPr>
+          <a:xfrm>
+            <a:off x="1097280" y="3466308"/>
+            <a:ext cx="474025" cy="474025"/>
           </a:xfrm>
           <a:prstGeom prst="roundRect">
             <a:avLst>
-              <a:gd name="adj" fmla="val 8000"/>
+              <a:gd name="adj" fmla="val 7716"/>
             </a:avLst>
           </a:prstGeom>
           <a:solidFill>
@@ -15194,7 +15632,7 @@
       </p:sp>
       <p:pic>
         <p:nvPicPr>
-          <p:cNvPr id="25" name="Image 4" descr="verified icon from tabler-icons (MIT)">    </p:cNvPr>
+          <p:cNvPr id="26" name="Image 4" descr="verified icon from tabler-icons (MIT)">    </p:cNvPr>
           <p:cNvPicPr>
             <a:picLocks noChangeAspect="1"/>
           </p:cNvPicPr>
@@ -15214,8 +15652,8 @@
         </p:blipFill>
         <p:spPr>
           <a:xfrm>
-            <a:off x="1170432" y="2839212"/>
-            <a:ext cx="310896" cy="310896"/>
+            <a:off x="1170432" y="3539460"/>
+            <a:ext cx="327721" cy="327721"/>
           </a:xfrm>
           <a:prstGeom prst="rect">
             <a:avLst/>
@@ -15224,14 +15662,14 @@
       </p:pic>
       <p:sp>
         <p:nvSpPr>
-          <p:cNvPr id="26" name="Text 19"/>
+          <p:cNvPr id="27" name="Text 20"/>
           <p:cNvSpPr txBox="1"/>
           <p:nvPr/>
         </p:nvSpPr>
         <p:spPr>
           <a:xfrm>
-            <a:off x="1682496" y="2651760"/>
-            <a:ext cx="9272016" cy="685800"/>
+            <a:off x="1699321" y="3283428"/>
+            <a:ext cx="9255191" cy="839785"/>
           </a:xfrm>
           <a:prstGeom prst="rect">
             <a:avLst/>
@@ -15283,18 +15721,18 @@
       </p:sp>
       <p:sp>
         <p:nvSpPr>
-          <p:cNvPr id="27" name="Shape 20"/>
-          <p:cNvSpPr/>
-          <p:nvPr/>
-        </p:nvSpPr>
-        <p:spPr>
-          <a:xfrm>
-            <a:off x="1097280" y="3909060"/>
-            <a:ext cx="457200" cy="457200"/>
+          <p:cNvPr id="28" name="Shape 21"/>
+          <p:cNvSpPr/>
+          <p:nvPr/>
+        </p:nvSpPr>
+        <p:spPr>
+          <a:xfrm>
+            <a:off x="1097280" y="4783044"/>
+            <a:ext cx="474025" cy="474025"/>
           </a:xfrm>
           <a:prstGeom prst="roundRect">
             <a:avLst>
-              <a:gd name="adj" fmla="val 8000"/>
+              <a:gd name="adj" fmla="val 7716"/>
             </a:avLst>
           </a:prstGeom>
           <a:solidFill>
@@ -15310,7 +15748,7 @@
       </p:sp>
       <p:pic>
         <p:nvPicPr>
-          <p:cNvPr id="28" name="Image 5" descr="spark icon from tabler-icons (MIT)">    </p:cNvPr>
+          <p:cNvPr id="29" name="Image 5" descr="spark icon from tabler-icons (MIT)">    </p:cNvPr>
           <p:cNvPicPr>
             <a:picLocks noChangeAspect="1"/>
           </p:cNvPicPr>
@@ -15330,8 +15768,8 @@
         </p:blipFill>
         <p:spPr>
           <a:xfrm>
-            <a:off x="1170432" y="3982212"/>
-            <a:ext cx="310896" cy="310896"/>
+            <a:off x="1170432" y="4856196"/>
+            <a:ext cx="327721" cy="327721"/>
           </a:xfrm>
           <a:prstGeom prst="rect">
             <a:avLst/>
@@ -15340,14 +15778,14 @@
       </p:pic>
       <p:sp>
         <p:nvSpPr>
-          <p:cNvPr id="29" name="Text 21"/>
+          <p:cNvPr id="30" name="Text 22"/>
           <p:cNvSpPr txBox="1"/>
           <p:nvPr/>
         </p:nvSpPr>
         <p:spPr>
           <a:xfrm>
-            <a:off x="1682496" y="3794760"/>
-            <a:ext cx="9272016" cy="685800"/>
+            <a:off x="1699321" y="4600164"/>
+            <a:ext cx="9255191" cy="839785"/>
           </a:xfrm>
           <a:prstGeom prst="rect">
             <a:avLst/>
@@ -16205,8 +16643,37 @@
         </p:nvSpPr>
         <p:spPr>
           <a:xfrm>
-            <a:off x="914400" y="1417320"/>
-            <a:ext cx="73152" cy="868680"/>
+            <a:off x="786384" y="1956816"/>
+            <a:ext cx="32004" cy="3483864"/>
+          </a:xfrm>
+          <a:prstGeom prst="rect">
+            <a:avLst/>
+          </a:prstGeom>
+          <a:solidFill>
+            <a:srgbClr val="22D3EE">
+              <a:alpha val="80000"/>
+            </a:srgbClr>
+          </a:solidFill>
+          <a:ln w="12700">
+            <a:solidFill>
+              <a:srgbClr val="22D3EE">
+                <a:alpha val="0"/>
+              </a:srgbClr>
+            </a:solidFill>
+            <a:prstDash val="solid"/>
+          </a:ln>
+        </p:spPr>
+      </p:sp>
+      <p:sp>
+        <p:nvSpPr>
+          <p:cNvPr id="12" name="Shape 10"/>
+          <p:cNvSpPr/>
+          <p:nvPr/>
+        </p:nvSpPr>
+        <p:spPr>
+          <a:xfrm>
+            <a:off x="914400" y="1865376"/>
+            <a:ext cx="73152" cy="1024128"/>
           </a:xfrm>
           <a:prstGeom prst="rect">
             <a:avLst/>
@@ -16226,14 +16693,14 @@
       </p:sp>
       <p:sp>
         <p:nvSpPr>
-          <p:cNvPr id="12" name="Shape 10"/>
-          <p:cNvSpPr/>
-          <p:nvPr/>
-        </p:nvSpPr>
-        <p:spPr>
-          <a:xfrm>
-            <a:off x="914400" y="2560320"/>
-            <a:ext cx="73152" cy="868680"/>
+          <p:cNvPr id="13" name="Shape 11"/>
+          <p:cNvSpPr/>
+          <p:nvPr/>
+        </p:nvSpPr>
+        <p:spPr>
+          <a:xfrm>
+            <a:off x="914400" y="3191256"/>
+            <a:ext cx="73152" cy="1024128"/>
           </a:xfrm>
           <a:prstGeom prst="rect">
             <a:avLst/>
@@ -16253,14 +16720,14 @@
       </p:sp>
       <p:sp>
         <p:nvSpPr>
-          <p:cNvPr id="13" name="Shape 11"/>
-          <p:cNvSpPr/>
-          <p:nvPr/>
-        </p:nvSpPr>
-        <p:spPr>
-          <a:xfrm>
-            <a:off x="914400" y="3703320"/>
-            <a:ext cx="73152" cy="868680"/>
+          <p:cNvPr id="14" name="Shape 12"/>
+          <p:cNvSpPr/>
+          <p:nvPr/>
+        </p:nvSpPr>
+        <p:spPr>
+          <a:xfrm>
+            <a:off x="914400" y="4507992"/>
+            <a:ext cx="73152" cy="1024128"/>
           </a:xfrm>
           <a:prstGeom prst="rect">
             <a:avLst/>
@@ -16280,7 +16747,7 @@
       </p:sp>
       <p:pic>
         <p:nvPicPr>
-          <p:cNvPr id="14" name="Image 0" descr="preencoded.png">    </p:cNvPr>
+          <p:cNvPr id="15" name="Image 0" descr="preencoded.png">    </p:cNvPr>
           <p:cNvPicPr>
             <a:picLocks noChangeAspect="1"/>
           </p:cNvPicPr>
@@ -16300,8 +16767,8 @@
         </p:blipFill>
         <p:spPr>
           <a:xfrm>
-            <a:off x="914400" y="1417320"/>
-            <a:ext cx="10241280" cy="868680"/>
+            <a:off x="914400" y="1865376"/>
+            <a:ext cx="10241280" cy="1024128"/>
           </a:xfrm>
           <a:prstGeom prst="rect">
             <a:avLst/>
@@ -16310,14 +16777,14 @@
       </p:pic>
       <p:sp>
         <p:nvSpPr>
-          <p:cNvPr id="15" name="Shape 12"/>
-          <p:cNvSpPr/>
-          <p:nvPr/>
-        </p:nvSpPr>
-        <p:spPr>
-          <a:xfrm>
-            <a:off x="914400" y="1417320"/>
-            <a:ext cx="10241280" cy="868680"/>
+          <p:cNvPr id="16" name="Shape 13"/>
+          <p:cNvSpPr/>
+          <p:nvPr/>
+        </p:nvSpPr>
+        <p:spPr>
+          <a:xfrm>
+            <a:off x="914400" y="1865376"/>
+            <a:ext cx="10241280" cy="1024128"/>
           </a:xfrm>
           <a:prstGeom prst="rect">
             <a:avLst/>
@@ -16351,7 +16818,7 @@
       </p:sp>
       <p:pic>
         <p:nvPicPr>
-          <p:cNvPr id="16" name="Image 1" descr="preencoded.png">    </p:cNvPr>
+          <p:cNvPr id="17" name="Image 1" descr="preencoded.png">    </p:cNvPr>
           <p:cNvPicPr>
             <a:picLocks noChangeAspect="1"/>
           </p:cNvPicPr>
@@ -16371,8 +16838,8 @@
         </p:blipFill>
         <p:spPr>
           <a:xfrm>
-            <a:off x="914400" y="2560320"/>
-            <a:ext cx="10241280" cy="868680"/>
+            <a:off x="914400" y="3191256"/>
+            <a:ext cx="10241280" cy="1024128"/>
           </a:xfrm>
           <a:prstGeom prst="rect">
             <a:avLst/>
@@ -16381,14 +16848,14 @@
       </p:pic>
       <p:sp>
         <p:nvSpPr>
-          <p:cNvPr id="17" name="Shape 13"/>
-          <p:cNvSpPr/>
-          <p:nvPr/>
-        </p:nvSpPr>
-        <p:spPr>
-          <a:xfrm>
-            <a:off x="914400" y="2560320"/>
-            <a:ext cx="10241280" cy="868680"/>
+          <p:cNvPr id="18" name="Shape 14"/>
+          <p:cNvSpPr/>
+          <p:nvPr/>
+        </p:nvSpPr>
+        <p:spPr>
+          <a:xfrm>
+            <a:off x="914400" y="3191256"/>
+            <a:ext cx="10241280" cy="1024128"/>
           </a:xfrm>
           <a:prstGeom prst="rect">
             <a:avLst/>
@@ -16422,7 +16889,7 @@
       </p:sp>
       <p:pic>
         <p:nvPicPr>
-          <p:cNvPr id="18" name="Image 2" descr="preencoded.png">    </p:cNvPr>
+          <p:cNvPr id="19" name="Image 2" descr="preencoded.png">    </p:cNvPr>
           <p:cNvPicPr>
             <a:picLocks noChangeAspect="1"/>
           </p:cNvPicPr>
@@ -16442,8 +16909,8 @@
         </p:blipFill>
         <p:spPr>
           <a:xfrm>
-            <a:off x="914400" y="3703320"/>
-            <a:ext cx="10241280" cy="868680"/>
+            <a:off x="914400" y="4507992"/>
+            <a:ext cx="10241280" cy="1024128"/>
           </a:xfrm>
           <a:prstGeom prst="rect">
             <a:avLst/>
@@ -16452,14 +16919,14 @@
       </p:pic>
       <p:sp>
         <p:nvSpPr>
-          <p:cNvPr id="19" name="Shape 14"/>
-          <p:cNvSpPr/>
-          <p:nvPr/>
-        </p:nvSpPr>
-        <p:spPr>
-          <a:xfrm>
-            <a:off x="914400" y="3703320"/>
-            <a:ext cx="10241280" cy="868680"/>
+          <p:cNvPr id="20" name="Shape 15"/>
+          <p:cNvSpPr/>
+          <p:nvPr/>
+        </p:nvSpPr>
+        <p:spPr>
+          <a:xfrm>
+            <a:off x="914400" y="4507992"/>
+            <a:ext cx="10241280" cy="1024128"/>
           </a:xfrm>
           <a:prstGeom prst="rect">
             <a:avLst/>
@@ -16493,7 +16960,7 @@
       </p:sp>
       <p:sp>
         <p:nvSpPr>
-          <p:cNvPr id="20" name="Text 15"/>
+          <p:cNvPr id="21" name="Text 16"/>
           <p:cNvSpPr txBox="1"/>
           <p:nvPr/>
         </p:nvSpPr>
@@ -16535,18 +17002,18 @@
       </p:sp>
       <p:sp>
         <p:nvSpPr>
-          <p:cNvPr id="21" name="Shape 16"/>
-          <p:cNvSpPr/>
-          <p:nvPr/>
-        </p:nvSpPr>
-        <p:spPr>
-          <a:xfrm>
-            <a:off x="1097280" y="1623060"/>
-            <a:ext cx="457200" cy="457200"/>
+          <p:cNvPr id="22" name="Shape 17"/>
+          <p:cNvSpPr/>
+          <p:nvPr/>
+        </p:nvSpPr>
+        <p:spPr>
+          <a:xfrm>
+            <a:off x="1097280" y="2140428"/>
+            <a:ext cx="474025" cy="474025"/>
           </a:xfrm>
           <a:prstGeom prst="roundRect">
             <a:avLst>
-              <a:gd name="adj" fmla="val 8000"/>
+              <a:gd name="adj" fmla="val 7716"/>
             </a:avLst>
           </a:prstGeom>
           <a:solidFill>
@@ -16562,7 +17029,7 @@
       </p:sp>
       <p:pic>
         <p:nvPicPr>
-          <p:cNvPr id="22" name="Image 3" descr="flow icon from tabler-icons (MIT)">    </p:cNvPr>
+          <p:cNvPr id="23" name="Image 3" descr="flow icon from tabler-icons (MIT)">    </p:cNvPr>
           <p:cNvPicPr>
             <a:picLocks noChangeAspect="1"/>
           </p:cNvPicPr>
@@ -16582,8 +17049,8 @@
         </p:blipFill>
         <p:spPr>
           <a:xfrm>
-            <a:off x="1170432" y="1696212"/>
-            <a:ext cx="310896" cy="310896"/>
+            <a:off x="1170432" y="2213580"/>
+            <a:ext cx="327721" cy="327721"/>
           </a:xfrm>
           <a:prstGeom prst="rect">
             <a:avLst/>
@@ -16592,14 +17059,14 @@
       </p:pic>
       <p:sp>
         <p:nvSpPr>
-          <p:cNvPr id="23" name="Text 17"/>
+          <p:cNvPr id="24" name="Text 18"/>
           <p:cNvSpPr txBox="1"/>
           <p:nvPr/>
         </p:nvSpPr>
         <p:spPr>
           <a:xfrm>
-            <a:off x="1682496" y="1508760"/>
-            <a:ext cx="9272016" cy="685800"/>
+            <a:off x="1699321" y="1957548"/>
+            <a:ext cx="9255191" cy="839785"/>
           </a:xfrm>
           <a:prstGeom prst="rect">
             <a:avLst/>
@@ -16626,7 +17093,7 @@
                 <a:ea typeface="Pretendard" pitchFamily="34" charset="-122"/>
                 <a:cs typeface="Pretendard" pitchFamily="34" charset="-120"/>
               </a:rPr>
-              <a:t>Plain / clean</a:t>
+              <a:t>Clean / minimalism</a:t>
             </a:r>
             <a:pPr algn="l" indent="0" marL="0">
               <a:lnSpc>
@@ -16643,7 +17110,7 @@
                 <a:ea typeface="Pretendard" pitchFamily="34" charset="-122"/>
                 <a:cs typeface="Pretendard" pitchFamily="34" charset="-120"/>
               </a:rPr>
-              <a:t>  low-decoration baselines.</a:t>
+              <a:t>  restrained structural baselines.</a:t>
             </a:r>
             <a:endParaRPr lang="en-US" sz="2200" dirty="0"/>
           </a:p>
@@ -16651,18 +17118,18 @@
       </p:sp>
       <p:sp>
         <p:nvSpPr>
-          <p:cNvPr id="24" name="Shape 18"/>
-          <p:cNvSpPr/>
-          <p:nvPr/>
-        </p:nvSpPr>
-        <p:spPr>
-          <a:xfrm>
-            <a:off x="1097280" y="2766060"/>
-            <a:ext cx="457200" cy="457200"/>
+          <p:cNvPr id="25" name="Shape 19"/>
+          <p:cNvSpPr/>
+          <p:nvPr/>
+        </p:nvSpPr>
+        <p:spPr>
+          <a:xfrm>
+            <a:off x="1097280" y="3466308"/>
+            <a:ext cx="474025" cy="474025"/>
           </a:xfrm>
           <a:prstGeom prst="roundRect">
             <a:avLst>
-              <a:gd name="adj" fmla="val 8000"/>
+              <a:gd name="adj" fmla="val 7716"/>
             </a:avLst>
           </a:prstGeom>
           <a:solidFill>
@@ -16678,7 +17145,7 @@
       </p:sp>
       <p:pic>
         <p:nvPicPr>
-          <p:cNvPr id="25" name="Image 4" descr="verified icon from tabler-icons (MIT)">    </p:cNvPr>
+          <p:cNvPr id="26" name="Image 4" descr="verified icon from tabler-icons (MIT)">    </p:cNvPr>
           <p:cNvPicPr>
             <a:picLocks noChangeAspect="1"/>
           </p:cNvPicPr>
@@ -16698,8 +17165,8 @@
         </p:blipFill>
         <p:spPr>
           <a:xfrm>
-            <a:off x="1170432" y="2839212"/>
-            <a:ext cx="310896" cy="310896"/>
+            <a:off x="1170432" y="3539460"/>
+            <a:ext cx="327721" cy="327721"/>
           </a:xfrm>
           <a:prstGeom prst="rect">
             <a:avLst/>
@@ -16708,14 +17175,14 @@
       </p:pic>
       <p:sp>
         <p:nvSpPr>
-          <p:cNvPr id="26" name="Text 19"/>
+          <p:cNvPr id="27" name="Text 20"/>
           <p:cNvSpPr txBox="1"/>
           <p:nvPr/>
         </p:nvSpPr>
         <p:spPr>
           <a:xfrm>
-            <a:off x="1682496" y="2651760"/>
-            <a:ext cx="9272016" cy="685800"/>
+            <a:off x="1699321" y="3283428"/>
+            <a:ext cx="9255191" cy="839785"/>
           </a:xfrm>
           <a:prstGeom prst="rect">
             <a:avLst/>
@@ -16767,18 +17234,18 @@
       </p:sp>
       <p:sp>
         <p:nvSpPr>
-          <p:cNvPr id="27" name="Shape 20"/>
-          <p:cNvSpPr/>
-          <p:nvPr/>
-        </p:nvSpPr>
-        <p:spPr>
-          <a:xfrm>
-            <a:off x="1097280" y="3909060"/>
-            <a:ext cx="457200" cy="457200"/>
+          <p:cNvPr id="28" name="Shape 21"/>
+          <p:cNvSpPr/>
+          <p:nvPr/>
+        </p:nvSpPr>
+        <p:spPr>
+          <a:xfrm>
+            <a:off x="1097280" y="4783044"/>
+            <a:ext cx="474025" cy="474025"/>
           </a:xfrm>
           <a:prstGeom prst="roundRect">
             <a:avLst>
-              <a:gd name="adj" fmla="val 8000"/>
+              <a:gd name="adj" fmla="val 7716"/>
             </a:avLst>
           </a:prstGeom>
           <a:solidFill>
@@ -16794,7 +17261,7 @@
       </p:sp>
       <p:pic>
         <p:nvPicPr>
-          <p:cNvPr id="28" name="Image 5" descr="spark icon from tabler-icons (MIT)">    </p:cNvPr>
+          <p:cNvPr id="29" name="Image 5" descr="spark icon from tabler-icons (MIT)">    </p:cNvPr>
           <p:cNvPicPr>
             <a:picLocks noChangeAspect="1"/>
           </p:cNvPicPr>
@@ -16814,8 +17281,8 @@
         </p:blipFill>
         <p:spPr>
           <a:xfrm>
-            <a:off x="1170432" y="3982212"/>
-            <a:ext cx="310896" cy="310896"/>
+            <a:off x="1170432" y="4856196"/>
+            <a:ext cx="327721" cy="327721"/>
           </a:xfrm>
           <a:prstGeom prst="rect">
             <a:avLst/>
@@ -16824,14 +17291,14 @@
       </p:pic>
       <p:sp>
         <p:nvSpPr>
-          <p:cNvPr id="29" name="Text 21"/>
+          <p:cNvPr id="30" name="Text 22"/>
           <p:cNvSpPr txBox="1"/>
           <p:nvPr/>
         </p:nvSpPr>
         <p:spPr>
           <a:xfrm>
-            <a:off x="1682496" y="3794760"/>
-            <a:ext cx="9272016" cy="685800"/>
+            <a:off x="1699321" y="4600164"/>
+            <a:ext cx="9255191" cy="839785"/>
           </a:xfrm>
           <a:prstGeom prst="rect">
             <a:avLst/>

--- a/docs/theme-preview/pptx/glass.pptx
+++ b/docs/theme-preview/pptx/glass.pptx
@@ -10308,7 +10308,7 @@
       </p:sp>
       <p:pic>
         <p:nvPicPr>
-          <p:cNvPr id="25" name="Image 4" descr="flow icon from tabler-icons (MIT)">    </p:cNvPr>
+          <p:cNvPr id="25" name="Image 4" descr="article icon from tabler-icons (MIT)">    </p:cNvPr>
           <p:cNvPicPr>
             <a:picLocks noChangeAspect="1"/>
           </p:cNvPicPr>
@@ -10424,7 +10424,7 @@
       </p:sp>
       <p:pic>
         <p:nvPicPr>
-          <p:cNvPr id="28" name="Image 5" descr="verified icon from tabler-icons (MIT)">    </p:cNvPr>
+          <p:cNvPr id="28" name="Image 5" descr="article icon from tabler-icons (MIT)">    </p:cNvPr>
           <p:cNvPicPr>
             <a:picLocks noChangeAspect="1"/>
           </p:cNvPicPr>
@@ -10540,7 +10540,7 @@
       </p:sp>
       <p:pic>
         <p:nvPicPr>
-          <p:cNvPr id="31" name="Image 6" descr="spark icon from tabler-icons (MIT)">    </p:cNvPr>
+          <p:cNvPr id="31" name="Image 6" descr="article icon from tabler-icons (MIT)">    </p:cNvPr>
           <p:cNvPicPr>
             <a:picLocks noChangeAspect="1"/>
           </p:cNvPicPr>
@@ -10656,7 +10656,7 @@
       </p:sp>
       <p:pic>
         <p:nvPicPr>
-          <p:cNvPr id="34" name="Image 7" descr="chart icon from tabler-icons (MIT)">    </p:cNvPr>
+          <p:cNvPr id="34" name="Image 7" descr="table icon from tabler-icons (MIT)">    </p:cNvPr>
           <p:cNvPicPr>
             <a:picLocks noChangeAspect="1"/>
           </p:cNvPicPr>
@@ -11499,7 +11499,7 @@
       </p:sp>
       <p:pic>
         <p:nvPicPr>
-          <p:cNvPr id="25" name="Image 4" descr="flow icon from tabler-icons (MIT)">    </p:cNvPr>
+          <p:cNvPr id="25" name="Image 4" descr="verified icon from tabler-icons (MIT)">    </p:cNvPr>
           <p:cNvPicPr>
             <a:picLocks noChangeAspect="1"/>
           </p:cNvPicPr>
@@ -11615,7 +11615,7 @@
       </p:sp>
       <p:pic>
         <p:nvPicPr>
-          <p:cNvPr id="28" name="Image 5" descr="verified icon from tabler-icons (MIT)">    </p:cNvPr>
+          <p:cNvPr id="28" name="Image 5" descr="table icon from tabler-icons (MIT)">    </p:cNvPr>
           <p:cNvPicPr>
             <a:picLocks noChangeAspect="1"/>
           </p:cNvPicPr>
@@ -11731,7 +11731,7 @@
       </p:sp>
       <p:pic>
         <p:nvPicPr>
-          <p:cNvPr id="31" name="Image 6" descr="spark icon from tabler-icons (MIT)">    </p:cNvPr>
+          <p:cNvPr id="31" name="Image 6" descr="article icon from tabler-icons (MIT)">    </p:cNvPr>
           <p:cNvPicPr>
             <a:picLocks noChangeAspect="1"/>
           </p:cNvPicPr>
@@ -11847,7 +11847,7 @@
       </p:sp>
       <p:pic>
         <p:nvPicPr>
-          <p:cNvPr id="34" name="Image 7" descr="chart icon from tabler-icons (MIT)">    </p:cNvPr>
+          <p:cNvPr id="34" name="Image 7" descr="article icon from tabler-icons (MIT)">    </p:cNvPr>
           <p:cNvPicPr>
             <a:picLocks noChangeAspect="1"/>
           </p:cNvPicPr>
@@ -15516,7 +15516,7 @@
       </p:sp>
       <p:pic>
         <p:nvPicPr>
-          <p:cNvPr id="23" name="Image 3" descr="flow icon from tabler-icons (MIT)">    </p:cNvPr>
+          <p:cNvPr id="23" name="Image 3" descr="article icon from tabler-icons (MIT)">    </p:cNvPr>
           <p:cNvPicPr>
             <a:picLocks noChangeAspect="1"/>
           </p:cNvPicPr>
@@ -15632,7 +15632,7 @@
       </p:sp>
       <p:pic>
         <p:nvPicPr>
-          <p:cNvPr id="26" name="Image 4" descr="verified icon from tabler-icons (MIT)">    </p:cNvPr>
+          <p:cNvPr id="26" name="Image 4" descr="chart icon from tabler-icons (MIT)">    </p:cNvPr>
           <p:cNvPicPr>
             <a:picLocks noChangeAspect="1"/>
           </p:cNvPicPr>
@@ -15748,7 +15748,7 @@
       </p:sp>
       <p:pic>
         <p:nvPicPr>
-          <p:cNvPr id="29" name="Image 5" descr="spark icon from tabler-icons (MIT)">    </p:cNvPr>
+          <p:cNvPr id="29" name="Image 5" descr="article icon from tabler-icons (MIT)">    </p:cNvPr>
           <p:cNvPicPr>
             <a:picLocks noChangeAspect="1"/>
           </p:cNvPicPr>
@@ -17029,7 +17029,7 @@
       </p:sp>
       <p:pic>
         <p:nvPicPr>
-          <p:cNvPr id="23" name="Image 3" descr="flow icon from tabler-icons (MIT)">    </p:cNvPr>
+          <p:cNvPr id="23" name="Image 3" descr="article icon from tabler-icons (MIT)">    </p:cNvPr>
           <p:cNvPicPr>
             <a:picLocks noChangeAspect="1"/>
           </p:cNvPicPr>
@@ -17145,7 +17145,7 @@
       </p:sp>
       <p:pic>
         <p:nvPicPr>
-          <p:cNvPr id="26" name="Image 4" descr="verified icon from tabler-icons (MIT)">    </p:cNvPr>
+          <p:cNvPr id="26" name="Image 4" descr="article icon from tabler-icons (MIT)">    </p:cNvPr>
           <p:cNvPicPr>
             <a:picLocks noChangeAspect="1"/>
           </p:cNvPicPr>
@@ -17261,7 +17261,7 @@
       </p:sp>
       <p:pic>
         <p:nvPicPr>
-          <p:cNvPr id="29" name="Image 5" descr="spark icon from tabler-icons (MIT)">    </p:cNvPr>
+          <p:cNvPr id="29" name="Image 5" descr="article icon from tabler-icons (MIT)">    </p:cNvPr>
           <p:cNvPicPr>
             <a:picLocks noChangeAspect="1"/>
           </p:cNvPicPr>
@@ -18611,7 +18611,7 @@
       </p:sp>
       <p:pic>
         <p:nvPicPr>
-          <p:cNvPr id="25" name="Image 4" descr="flow icon from tabler-icons (MIT)">    </p:cNvPr>
+          <p:cNvPr id="25" name="Image 4" descr="table icon from tabler-icons (MIT)">    </p:cNvPr>
           <p:cNvPicPr>
             <a:picLocks noChangeAspect="1"/>
           </p:cNvPicPr>
@@ -18727,7 +18727,7 @@
       </p:sp>
       <p:pic>
         <p:nvPicPr>
-          <p:cNvPr id="28" name="Image 5" descr="verified icon from tabler-icons (MIT)">    </p:cNvPr>
+          <p:cNvPr id="28" name="Image 5" descr="article icon from tabler-icons (MIT)">    </p:cNvPr>
           <p:cNvPicPr>
             <a:picLocks noChangeAspect="1"/>
           </p:cNvPicPr>
@@ -18843,7 +18843,7 @@
       </p:sp>
       <p:pic>
         <p:nvPicPr>
-          <p:cNvPr id="31" name="Image 6" descr="spark icon from tabler-icons (MIT)">    </p:cNvPr>
+          <p:cNvPr id="31" name="Image 6" descr="article icon from tabler-icons (MIT)">    </p:cNvPr>
           <p:cNvPicPr>
             <a:picLocks noChangeAspect="1"/>
           </p:cNvPicPr>
@@ -18959,7 +18959,7 @@
       </p:sp>
       <p:pic>
         <p:nvPicPr>
-          <p:cNvPr id="34" name="Image 7" descr="chart icon from tabler-icons (MIT)">    </p:cNvPr>
+          <p:cNvPr id="34" name="Image 7" descr="table icon from tabler-icons (MIT)">    </p:cNvPr>
           <p:cNvPicPr>
             <a:picLocks noChangeAspect="1"/>
           </p:cNvPicPr>

--- a/docs/theme-preview/pptx/glass.pptx
+++ b/docs/theme-preview/pptx/glass.pptx
@@ -13676,7 +13676,7 @@
                 <a:ea typeface="Pretendard" pitchFamily="34" charset="-122"/>
                 <a:cs typeface="Pretendard" pitchFamily="34" charset="-120"/>
               </a:rPr>
-              <a:t>목차</a:t>
+              <a:t>Agenda</a:t>
             </a:r>
             <a:endParaRPr lang="en-US" sz="3800" dirty="0"/>
           </a:p>

--- a/docs/theme-preview/pptx/glass.pptx
+++ b/docs/theme-preview/pptx/glass.pptx
@@ -3472,36 +3472,80 @@
           </a:ln>
         </p:spPr>
       </p:sp>
-      <p:sp>
-        <p:nvSpPr>
-          <p:cNvPr id="11" name="Shape 9"/>
-          <p:cNvSpPr/>
-          <p:nvPr/>
-        </p:nvSpPr>
-        <p:spPr>
-          <a:xfrm>
-            <a:off x="914400" y="1463040"/>
-            <a:ext cx="10241280" cy="73152"/>
-          </a:xfrm>
-          <a:prstGeom prst="rect">
-            <a:avLst/>
-          </a:prstGeom>
-          <a:solidFill>
-            <a:srgbClr val="8A4FFF"/>
-          </a:solidFill>
-          <a:ln w="12700">
-            <a:solidFill>
+      <p:pic>
+        <p:nvPicPr>
+          <p:cNvPr id="11" name="Image 0" descr="preencoded.png">    </p:cNvPr>
+          <p:cNvPicPr>
+            <a:picLocks noChangeAspect="1"/>
+          </p:cNvPicPr>
+          <p:nvPr/>
+        </p:nvPicPr>
+        <p:blipFill>
+          <a:blip r:embed="rId1">
+            <a:extLst>
+              <a:ext uri="{96DAC541-7B7A-43D3-8B79-37D633B846F1}">
+                <asvg:svgBlip xmlns:asvg="http://schemas.microsoft.com/office/drawing/2016/SVG/main" r:embed="rId2"/>
+              </a:ext>
+            </a:extLst>
+          </a:blip>
+          <a:stretch>
+            <a:fillRect/>
+          </a:stretch>
+        </p:blipFill>
+        <p:spPr>
+          <a:xfrm>
+            <a:off x="914400" y="1417320"/>
+            <a:ext cx="10241280" cy="4526280"/>
+          </a:xfrm>
+          <a:prstGeom prst="rect">
+            <a:avLst/>
+          </a:prstGeom>
+        </p:spPr>
+      </p:pic>
+      <p:sp>
+        <p:nvSpPr>
+          <p:cNvPr id="12" name="Shape 9"/>
+          <p:cNvSpPr/>
+          <p:nvPr/>
+        </p:nvSpPr>
+        <p:spPr>
+          <a:xfrm>
+            <a:off x="914400" y="1417320"/>
+            <a:ext cx="10241280" cy="4526280"/>
+          </a:xfrm>
+          <a:prstGeom prst="rect">
+            <a:avLst/>
+          </a:prstGeom>
+          <a:solidFill>
+            <a:srgbClr val="17213A">
+              <a:alpha val="0"/>
+            </a:srgbClr>
+          </a:solidFill>
+          <a:ln w="12700">
+            <a:solidFill>
+              <a:srgbClr val="C4B5FD">
+                <a:alpha val="0"/>
+              </a:srgbClr>
+            </a:solidFill>
+            <a:prstDash val="solid"/>
+          </a:ln>
+          <a:effectLst>
+            <a:outerShdw sx="100000" sy="100000" kx="0" ky="0" algn="bl" rotWithShape="0" blurRad="30480" dist="50800" dir="2700000">
+              <a:srgbClr val="CBD5E1">
+                <a:alpha val="20000"/>
+              </a:srgbClr>
+            </a:outerShdw>
+            <a:glow rad="63500">
               <a:srgbClr val="8A4FFF">
-                <a:alpha val="0"/>
-              </a:srgbClr>
-            </a:solidFill>
-            <a:prstDash val="solid"/>
-          </a:ln>
-        </p:spPr>
-      </p:sp>
-      <p:sp>
-        <p:nvSpPr>
-          <p:cNvPr id="12" name="Text 10"/>
+                <a:alpha val="23000"/>
+              </a:srgbClr>
+            </a:glow>
+          </a:effectLst>
+        </p:spPr>
+      </p:sp>
+      <p:sp>
+        <p:nvSpPr>
+          <p:cNvPr id="13" name="Text 10"/>
           <p:cNvSpPr txBox="1"/>
           <p:nvPr/>
         </p:nvSpPr>
@@ -3556,8 +3600,8 @@
           </p:nvPr>
         </p:nvGraphicFramePr>
         <p:xfrm>
-          <a:off x="914400" y="1463040"/>
-          <a:ext cx="10241280" cy="4480560"/>
+          <a:off x="914400" y="1417320"/>
+          <a:ext cx="10241280" cy="4526280"/>
         </p:xfrm>
         <a:graphic>
           <a:graphicData uri="http://schemas.openxmlformats.org/drawingml/2006/table">
@@ -3568,7 +3612,7 @@
                 <a:gridCol w="3413760"/>
                 <a:gridCol w="3413760"/>
               </a:tblGrid>
-              <a:tr h="896112">
+              <a:tr h="905256">
                 <a:tc>
                   <a:txBody>
                     <a:bodyPr/>
@@ -3578,7 +3622,7 @@
                         <a:buNone/>
                       </a:pPr>
                       <a:r>
-                        <a:rPr lang="en-US" sz="2200" b="1" dirty="0">
+                        <a:rPr lang="en-US" sz="1800" b="1" dirty="0">
                           <a:solidFill>
                             <a:srgbClr val="FFFFFF"/>
                           </a:solidFill>
@@ -3588,7 +3632,7 @@
                         </a:rPr>
                         <a:t>Object</a:t>
                       </a:r>
-                      <a:endParaRPr lang="en-US" sz="2200" dirty="0">
+                      <a:endParaRPr lang="en-US" sz="1800" dirty="0">
                         <a:latin typeface="Pretendard" charset="0"/>
                         <a:ea typeface="Pretendard" charset="0"/>
                         <a:cs typeface="Pretendard" charset="0"/>
@@ -3646,7 +3690,7 @@
                         <a:buNone/>
                       </a:pPr>
                       <a:r>
-                        <a:rPr lang="en-US" sz="2200" b="1" dirty="0">
+                        <a:rPr lang="en-US" sz="1800" b="1" dirty="0">
                           <a:solidFill>
                             <a:srgbClr val="FFFFFF"/>
                           </a:solidFill>
@@ -3656,7 +3700,7 @@
                         </a:rPr>
                         <a:t>Renderer expectation</a:t>
                       </a:r>
-                      <a:endParaRPr lang="en-US" sz="2200" dirty="0">
+                      <a:endParaRPr lang="en-US" sz="1800" dirty="0">
                         <a:latin typeface="Pretendard" charset="0"/>
                         <a:ea typeface="Pretendard" charset="0"/>
                         <a:cs typeface="Pretendard" charset="0"/>
@@ -3714,7 +3758,7 @@
                         <a:buNone/>
                       </a:pPr>
                       <a:r>
-                        <a:rPr lang="en-US" sz="2200" b="1" dirty="0">
+                        <a:rPr lang="en-US" sz="1800" b="1" dirty="0">
                           <a:solidFill>
                             <a:srgbClr val="FFFFFF"/>
                           </a:solidFill>
@@ -3724,7 +3768,7 @@
                         </a:rPr>
                         <a:t>QA signal</a:t>
                       </a:r>
-                      <a:endParaRPr lang="en-US" sz="2200" dirty="0">
+                      <a:endParaRPr lang="en-US" sz="1800" dirty="0">
                         <a:latin typeface="Pretendard" charset="0"/>
                         <a:ea typeface="Pretendard" charset="0"/>
                         <a:cs typeface="Pretendard" charset="0"/>
@@ -3774,7 +3818,7 @@
                   </a:tcPr>
                 </a:tc>
               </a:tr>
-              <a:tr h="896112">
+              <a:tr h="905256">
                 <a:tc>
                   <a:txBody>
                     <a:bodyPr/>
@@ -3784,7 +3828,7 @@
                         <a:buNone/>
                       </a:pPr>
                       <a:r>
-                        <a:rPr lang="en-US" sz="2200" b="1" dirty="0">
+                        <a:rPr lang="en-US" sz="1800" b="1" dirty="0">
                           <a:solidFill>
                             <a:srgbClr val="F8FAFC"/>
                           </a:solidFill>
@@ -3794,7 +3838,7 @@
                         </a:rPr>
                         <a:t>Text box</a:t>
                       </a:r>
-                      <a:endParaRPr lang="en-US" sz="2200" dirty="0">
+                      <a:endParaRPr lang="en-US" sz="1800" dirty="0">
                         <a:latin typeface="Pretendard" charset="0"/>
                         <a:ea typeface="Pretendard" charset="0"/>
                         <a:cs typeface="Pretendard" charset="0"/>
@@ -3849,7 +3893,7 @@
                         <a:buNone/>
                       </a:pPr>
                       <a:r>
-                        <a:rPr lang="en-US" sz="2200" dirty="0">
+                        <a:rPr lang="en-US" sz="1800" dirty="0">
                           <a:solidFill>
                             <a:srgbClr val="F8FAFC"/>
                           </a:solidFill>
@@ -3859,7 +3903,7 @@
                         </a:rPr>
                         <a:t>editable, middle aligned</a:t>
                       </a:r>
-                      <a:endParaRPr lang="en-US" sz="2200" dirty="0">
+                      <a:endParaRPr lang="en-US" sz="1800" dirty="0">
                         <a:latin typeface="Pretendard" charset="0"/>
                         <a:ea typeface="Pretendard" charset="0"/>
                         <a:cs typeface="Pretendard" charset="0"/>
@@ -3914,7 +3958,7 @@
                         <a:buNone/>
                       </a:pPr>
                       <a:r>
-                        <a:rPr lang="en-US" sz="2200" dirty="0">
+                        <a:rPr lang="en-US" sz="1800" dirty="0">
                           <a:solidFill>
                             <a:srgbClr val="F8FAFC"/>
                           </a:solidFill>
@@ -3924,7 +3968,7 @@
                         </a:rPr>
                         <a:t>readable minimum size</a:t>
                       </a:r>
-                      <a:endParaRPr lang="en-US" sz="2200" dirty="0">
+                      <a:endParaRPr lang="en-US" sz="1800" dirty="0">
                         <a:latin typeface="Pretendard" charset="0"/>
                         <a:ea typeface="Pretendard" charset="0"/>
                         <a:cs typeface="Pretendard" charset="0"/>
@@ -3971,7 +4015,7 @@
                   </a:tcPr>
                 </a:tc>
               </a:tr>
-              <a:tr h="896112">
+              <a:tr h="905256">
                 <a:tc>
                   <a:txBody>
                     <a:bodyPr/>
@@ -3981,7 +4025,7 @@
                         <a:buNone/>
                       </a:pPr>
                       <a:r>
-                        <a:rPr lang="en-US" sz="2200" b="1" dirty="0">
+                        <a:rPr lang="en-US" sz="1800" b="1" dirty="0">
                           <a:solidFill>
                             <a:srgbClr val="F8FAFC"/>
                           </a:solidFill>
@@ -3991,7 +4035,7 @@
                         </a:rPr>
                         <a:t>Table</a:t>
                       </a:r>
-                      <a:endParaRPr lang="en-US" sz="2200" dirty="0">
+                      <a:endParaRPr lang="en-US" sz="1800" dirty="0">
                         <a:latin typeface="Pretendard" charset="0"/>
                         <a:ea typeface="Pretendard" charset="0"/>
                         <a:cs typeface="Pretendard" charset="0"/>
@@ -4051,7 +4095,7 @@
                         <a:buNone/>
                       </a:pPr>
                       <a:r>
-                        <a:rPr lang="en-US" sz="2200" dirty="0">
+                        <a:rPr lang="en-US" sz="1800" dirty="0">
                           <a:solidFill>
                             <a:srgbClr val="F8FAFC"/>
                           </a:solidFill>
@@ -4061,7 +4105,7 @@
                         </a:rPr>
                         <a:t>native table object</a:t>
                       </a:r>
-                      <a:endParaRPr lang="en-US" sz="2200" dirty="0">
+                      <a:endParaRPr lang="en-US" sz="1800" dirty="0">
                         <a:latin typeface="Pretendard" charset="0"/>
                         <a:ea typeface="Pretendard" charset="0"/>
                         <a:cs typeface="Pretendard" charset="0"/>
@@ -4121,7 +4165,7 @@
                         <a:buNone/>
                       </a:pPr>
                       <a:r>
-                        <a:rPr lang="en-US" sz="2200" dirty="0">
+                        <a:rPr lang="en-US" sz="1800" dirty="0">
                           <a:solidFill>
                             <a:srgbClr val="F8FAFC"/>
                           </a:solidFill>
@@ -4131,7 +4175,7 @@
                         </a:rPr>
                         <a:t>header fill and cell padding</a:t>
                       </a:r>
-                      <a:endParaRPr lang="en-US" sz="2200" dirty="0">
+                      <a:endParaRPr lang="en-US" sz="1800" dirty="0">
                         <a:latin typeface="Pretendard" charset="0"/>
                         <a:ea typeface="Pretendard" charset="0"/>
                         <a:cs typeface="Pretendard" charset="0"/>
@@ -4183,7 +4227,7 @@
                   </a:tcPr>
                 </a:tc>
               </a:tr>
-              <a:tr h="896112">
+              <a:tr h="905256">
                 <a:tc>
                   <a:txBody>
                     <a:bodyPr/>
@@ -4193,7 +4237,7 @@
                         <a:buNone/>
                       </a:pPr>
                       <a:r>
-                        <a:rPr lang="en-US" sz="2200" b="1" dirty="0">
+                        <a:rPr lang="en-US" sz="1800" b="1" dirty="0">
                           <a:solidFill>
                             <a:srgbClr val="F8FAFC"/>
                           </a:solidFill>
@@ -4203,7 +4247,7 @@
                         </a:rPr>
                         <a:t>Diagram</a:t>
                       </a:r>
-                      <a:endParaRPr lang="en-US" sz="2200" dirty="0">
+                      <a:endParaRPr lang="en-US" sz="1800" dirty="0">
                         <a:latin typeface="Pretendard" charset="0"/>
                         <a:ea typeface="Pretendard" charset="0"/>
                         <a:cs typeface="Pretendard" charset="0"/>
@@ -4258,7 +4302,7 @@
                         <a:buNone/>
                       </a:pPr>
                       <a:r>
-                        <a:rPr lang="en-US" sz="2200" dirty="0">
+                        <a:rPr lang="en-US" sz="1800" dirty="0">
                           <a:solidFill>
                             <a:srgbClr val="F8FAFC"/>
                           </a:solidFill>
@@ -4268,7 +4312,7 @@
                         </a:rPr>
                         <a:t>nodes and connectors</a:t>
                       </a:r>
-                      <a:endParaRPr lang="en-US" sz="2200" dirty="0">
+                      <a:endParaRPr lang="en-US" sz="1800" dirty="0">
                         <a:latin typeface="Pretendard" charset="0"/>
                         <a:ea typeface="Pretendard" charset="0"/>
                         <a:cs typeface="Pretendard" charset="0"/>
@@ -4323,7 +4367,7 @@
                         <a:buNone/>
                       </a:pPr>
                       <a:r>
-                        <a:rPr lang="en-US" sz="2200" dirty="0">
+                        <a:rPr lang="en-US" sz="1800" dirty="0">
                           <a:solidFill>
                             <a:srgbClr val="F8FAFC"/>
                           </a:solidFill>
@@ -4333,7 +4377,7 @@
                         </a:rPr>
                         <a:t>no clipped labels</a:t>
                       </a:r>
-                      <a:endParaRPr lang="en-US" sz="2200" dirty="0">
+                      <a:endParaRPr lang="en-US" sz="1800" dirty="0">
                         <a:latin typeface="Pretendard" charset="0"/>
                         <a:ea typeface="Pretendard" charset="0"/>
                         <a:cs typeface="Pretendard" charset="0"/>
@@ -4380,7 +4424,7 @@
                   </a:tcPr>
                 </a:tc>
               </a:tr>
-              <a:tr h="896112">
+              <a:tr h="905256">
                 <a:tc>
                   <a:txBody>
                     <a:bodyPr/>
@@ -4390,7 +4434,7 @@
                         <a:buNone/>
                       </a:pPr>
                       <a:r>
-                        <a:rPr lang="en-US" sz="2200" b="1" dirty="0">
+                        <a:rPr lang="en-US" sz="1800" b="1" dirty="0">
                           <a:solidFill>
                             <a:srgbClr val="F8FAFC"/>
                           </a:solidFill>
@@ -4400,7 +4444,7 @@
                         </a:rPr>
                         <a:t>Chart</a:t>
                       </a:r>
-                      <a:endParaRPr lang="en-US" sz="2200" dirty="0">
+                      <a:endParaRPr lang="en-US" sz="1800" dirty="0">
                         <a:latin typeface="Pretendard" charset="0"/>
                         <a:ea typeface="Pretendard" charset="0"/>
                         <a:cs typeface="Pretendard" charset="0"/>
@@ -4460,7 +4504,7 @@
                         <a:buNone/>
                       </a:pPr>
                       <a:r>
-                        <a:rPr lang="en-US" sz="2200" dirty="0">
+                        <a:rPr lang="en-US" sz="1800" dirty="0">
                           <a:solidFill>
                             <a:srgbClr val="F8FAFC"/>
                           </a:solidFill>
@@ -4470,7 +4514,7 @@
                         </a:rPr>
                         <a:t>theme-colored data object</a:t>
                       </a:r>
-                      <a:endParaRPr lang="en-US" sz="2200" dirty="0">
+                      <a:endParaRPr lang="en-US" sz="1800" dirty="0">
                         <a:latin typeface="Pretendard" charset="0"/>
                         <a:ea typeface="Pretendard" charset="0"/>
                         <a:cs typeface="Pretendard" charset="0"/>
@@ -4530,7 +4574,7 @@
                         <a:buNone/>
                       </a:pPr>
                       <a:r>
-                        <a:rPr lang="en-US" sz="2200" dirty="0">
+                        <a:rPr lang="en-US" sz="1800" dirty="0">
                           <a:solidFill>
                             <a:srgbClr val="F8FAFC"/>
                           </a:solidFill>
@@ -4540,7 +4584,7 @@
                         </a:rPr>
                         <a:t>contrast and value clarity</a:t>
                       </a:r>
-                      <a:endParaRPr lang="en-US" sz="2200" dirty="0">
+                      <a:endParaRPr lang="en-US" sz="1800" dirty="0">
                         <a:latin typeface="Pretendard" charset="0"/>
                         <a:ea typeface="Pretendard" charset="0"/>
                         <a:cs typeface="Pretendard" charset="0"/>
@@ -5477,36 +5521,80 @@
           </a:ln>
         </p:spPr>
       </p:sp>
-      <p:sp>
-        <p:nvSpPr>
-          <p:cNvPr id="11" name="Shape 9"/>
-          <p:cNvSpPr/>
-          <p:nvPr/>
-        </p:nvSpPr>
-        <p:spPr>
-          <a:xfrm>
-            <a:off x="914400" y="1463040"/>
-            <a:ext cx="10241280" cy="73152"/>
-          </a:xfrm>
-          <a:prstGeom prst="rect">
-            <a:avLst/>
-          </a:prstGeom>
-          <a:solidFill>
-            <a:srgbClr val="8A4FFF"/>
-          </a:solidFill>
-          <a:ln w="12700">
-            <a:solidFill>
+      <p:pic>
+        <p:nvPicPr>
+          <p:cNvPr id="11" name="Image 0" descr="preencoded.png">    </p:cNvPr>
+          <p:cNvPicPr>
+            <a:picLocks noChangeAspect="1"/>
+          </p:cNvPicPr>
+          <p:nvPr/>
+        </p:nvPicPr>
+        <p:blipFill>
+          <a:blip r:embed="rId1">
+            <a:extLst>
+              <a:ext uri="{96DAC541-7B7A-43D3-8B79-37D633B846F1}">
+                <asvg:svgBlip xmlns:asvg="http://schemas.microsoft.com/office/drawing/2016/SVG/main" r:embed="rId2"/>
+              </a:ext>
+            </a:extLst>
+          </a:blip>
+          <a:stretch>
+            <a:fillRect/>
+          </a:stretch>
+        </p:blipFill>
+        <p:spPr>
+          <a:xfrm>
+            <a:off x="914400" y="1417320"/>
+            <a:ext cx="10241280" cy="4526280"/>
+          </a:xfrm>
+          <a:prstGeom prst="rect">
+            <a:avLst/>
+          </a:prstGeom>
+        </p:spPr>
+      </p:pic>
+      <p:sp>
+        <p:nvSpPr>
+          <p:cNvPr id="12" name="Shape 9"/>
+          <p:cNvSpPr/>
+          <p:nvPr/>
+        </p:nvSpPr>
+        <p:spPr>
+          <a:xfrm>
+            <a:off x="914400" y="1417320"/>
+            <a:ext cx="10241280" cy="4526280"/>
+          </a:xfrm>
+          <a:prstGeom prst="rect">
+            <a:avLst/>
+          </a:prstGeom>
+          <a:solidFill>
+            <a:srgbClr val="17213A">
+              <a:alpha val="0"/>
+            </a:srgbClr>
+          </a:solidFill>
+          <a:ln w="12700">
+            <a:solidFill>
+              <a:srgbClr val="C4B5FD">
+                <a:alpha val="0"/>
+              </a:srgbClr>
+            </a:solidFill>
+            <a:prstDash val="solid"/>
+          </a:ln>
+          <a:effectLst>
+            <a:outerShdw sx="100000" sy="100000" kx="0" ky="0" algn="bl" rotWithShape="0" blurRad="30480" dist="50800" dir="2700000">
+              <a:srgbClr val="CBD5E1">
+                <a:alpha val="20000"/>
+              </a:srgbClr>
+            </a:outerShdw>
+            <a:glow rad="63500">
               <a:srgbClr val="8A4FFF">
-                <a:alpha val="0"/>
-              </a:srgbClr>
-            </a:solidFill>
-            <a:prstDash val="solid"/>
-          </a:ln>
-        </p:spPr>
-      </p:sp>
-      <p:sp>
-        <p:nvSpPr>
-          <p:cNvPr id="12" name="Text 10"/>
+                <a:alpha val="23000"/>
+              </a:srgbClr>
+            </a:glow>
+          </a:effectLst>
+        </p:spPr>
+      </p:sp>
+      <p:sp>
+        <p:nvSpPr>
+          <p:cNvPr id="13" name="Text 10"/>
           <p:cNvSpPr txBox="1"/>
           <p:nvPr/>
         </p:nvSpPr>
@@ -5561,8 +5649,8 @@
           </p:nvPr>
         </p:nvGraphicFramePr>
         <p:xfrm>
-          <a:off x="914400" y="1463040"/>
-          <a:ext cx="10241280" cy="4480560"/>
+          <a:off x="914400" y="1417320"/>
+          <a:ext cx="10241280" cy="4526280"/>
         </p:xfrm>
         <a:graphic>
           <a:graphicData uri="http://schemas.openxmlformats.org/drawingml/2006/table">
@@ -5573,7 +5661,7 @@
                 <a:gridCol w="3413760"/>
                 <a:gridCol w="3413760"/>
               </a:tblGrid>
-              <a:tr h="1120140">
+              <a:tr h="1131570">
                 <a:tc>
                   <a:txBody>
                     <a:bodyPr/>
@@ -5583,7 +5671,7 @@
                         <a:buNone/>
                       </a:pPr>
                       <a:r>
-                        <a:rPr lang="en-US" sz="2200" b="1" dirty="0">
+                        <a:rPr lang="en-US" sz="1800" b="1" dirty="0">
                           <a:solidFill>
                             <a:srgbClr val="FFFFFF"/>
                           </a:solidFill>
@@ -5593,7 +5681,7 @@
                         </a:rPr>
                         <a:t>Stage</a:t>
                       </a:r>
-                      <a:endParaRPr lang="en-US" sz="2200" dirty="0">
+                      <a:endParaRPr lang="en-US" sz="1800" dirty="0">
                         <a:latin typeface="Pretendard" charset="0"/>
                         <a:ea typeface="Pretendard" charset="0"/>
                         <a:cs typeface="Pretendard" charset="0"/>
@@ -5651,7 +5739,7 @@
                         <a:buNone/>
                       </a:pPr>
                       <a:r>
-                        <a:rPr lang="en-US" sz="2200" b="1" dirty="0">
+                        <a:rPr lang="en-US" sz="1800" b="1" dirty="0">
                           <a:solidFill>
                             <a:srgbClr val="FFFFFF"/>
                           </a:solidFill>
@@ -5661,7 +5749,7 @@
                         </a:rPr>
                         <a:t>Coverage</a:t>
                       </a:r>
-                      <a:endParaRPr lang="en-US" sz="2200" dirty="0">
+                      <a:endParaRPr lang="en-US" sz="1800" dirty="0">
                         <a:latin typeface="Pretendard" charset="0"/>
                         <a:ea typeface="Pretendard" charset="0"/>
                         <a:cs typeface="Pretendard" charset="0"/>
@@ -5719,7 +5807,7 @@
                         <a:buNone/>
                       </a:pPr>
                       <a:r>
-                        <a:rPr lang="en-US" sz="2200" b="1" dirty="0">
+                        <a:rPr lang="en-US" sz="1800" b="1" dirty="0">
                           <a:solidFill>
                             <a:srgbClr val="FFFFFF"/>
                           </a:solidFill>
@@ -5729,7 +5817,7 @@
                         </a:rPr>
                         <a:t>Defects</a:t>
                       </a:r>
-                      <a:endParaRPr lang="en-US" sz="2200" dirty="0">
+                      <a:endParaRPr lang="en-US" sz="1800" dirty="0">
                         <a:latin typeface="Pretendard" charset="0"/>
                         <a:ea typeface="Pretendard" charset="0"/>
                         <a:cs typeface="Pretendard" charset="0"/>
@@ -5779,7 +5867,7 @@
                   </a:tcPr>
                 </a:tc>
               </a:tr>
-              <a:tr h="1120140">
+              <a:tr h="1131570">
                 <a:tc>
                   <a:txBody>
                     <a:bodyPr/>
@@ -5789,7 +5877,7 @@
                         <a:buNone/>
                       </a:pPr>
                       <a:r>
-                        <a:rPr lang="en-US" sz="2200" b="1" dirty="0">
+                        <a:rPr lang="en-US" sz="1800" b="1" dirty="0">
                           <a:solidFill>
                             <a:srgbClr val="F8FAFC"/>
                           </a:solidFill>
@@ -5799,7 +5887,7 @@
                         </a:rPr>
                         <a:t>Parser</a:t>
                       </a:r>
-                      <a:endParaRPr lang="en-US" sz="2200" dirty="0">
+                      <a:endParaRPr lang="en-US" sz="1800" dirty="0">
                         <a:latin typeface="Pretendard" charset="0"/>
                         <a:ea typeface="Pretendard" charset="0"/>
                         <a:cs typeface="Pretendard" charset="0"/>
@@ -5854,7 +5942,7 @@
                         <a:buNone/>
                       </a:pPr>
                       <a:r>
-                        <a:rPr lang="en-US" sz="2200" dirty="0">
+                        <a:rPr lang="en-US" sz="1800" dirty="0">
                           <a:solidFill>
                             <a:srgbClr val="F8FAFC"/>
                           </a:solidFill>
@@ -5864,7 +5952,7 @@
                         </a:rPr>
                         <a:t>92</a:t>
                       </a:r>
-                      <a:endParaRPr lang="en-US" sz="2200" dirty="0">
+                      <a:endParaRPr lang="en-US" sz="1800" dirty="0">
                         <a:latin typeface="Pretendard" charset="0"/>
                         <a:ea typeface="Pretendard" charset="0"/>
                         <a:cs typeface="Pretendard" charset="0"/>
@@ -5919,7 +6007,7 @@
                         <a:buNone/>
                       </a:pPr>
                       <a:r>
-                        <a:rPr lang="en-US" sz="2200" dirty="0">
+                        <a:rPr lang="en-US" sz="1800" dirty="0">
                           <a:solidFill>
                             <a:srgbClr val="F8FAFC"/>
                           </a:solidFill>
@@ -5929,7 +6017,7 @@
                         </a:rPr>
                         <a:t>3</a:t>
                       </a:r>
-                      <a:endParaRPr lang="en-US" sz="2200" dirty="0">
+                      <a:endParaRPr lang="en-US" sz="1800" dirty="0">
                         <a:latin typeface="Pretendard" charset="0"/>
                         <a:ea typeface="Pretendard" charset="0"/>
                         <a:cs typeface="Pretendard" charset="0"/>
@@ -5976,7 +6064,7 @@
                   </a:tcPr>
                 </a:tc>
               </a:tr>
-              <a:tr h="1120140">
+              <a:tr h="1131570">
                 <a:tc>
                   <a:txBody>
                     <a:bodyPr/>
@@ -5986,7 +6074,7 @@
                         <a:buNone/>
                       </a:pPr>
                       <a:r>
-                        <a:rPr lang="en-US" sz="2200" b="1" dirty="0">
+                        <a:rPr lang="en-US" sz="1800" b="1" dirty="0">
                           <a:solidFill>
                             <a:srgbClr val="F8FAFC"/>
                           </a:solidFill>
@@ -5996,7 +6084,7 @@
                         </a:rPr>
                         <a:t>Layout</a:t>
                       </a:r>
-                      <a:endParaRPr lang="en-US" sz="2200" dirty="0">
+                      <a:endParaRPr lang="en-US" sz="1800" dirty="0">
                         <a:latin typeface="Pretendard" charset="0"/>
                         <a:ea typeface="Pretendard" charset="0"/>
                         <a:cs typeface="Pretendard" charset="0"/>
@@ -6056,7 +6144,7 @@
                         <a:buNone/>
                       </a:pPr>
                       <a:r>
-                        <a:rPr lang="en-US" sz="2200" dirty="0">
+                        <a:rPr lang="en-US" sz="1800" dirty="0">
                           <a:solidFill>
                             <a:srgbClr val="F8FAFC"/>
                           </a:solidFill>
@@ -6066,7 +6154,7 @@
                         </a:rPr>
                         <a:t>88</a:t>
                       </a:r>
-                      <a:endParaRPr lang="en-US" sz="2200" dirty="0">
+                      <a:endParaRPr lang="en-US" sz="1800" dirty="0">
                         <a:latin typeface="Pretendard" charset="0"/>
                         <a:ea typeface="Pretendard" charset="0"/>
                         <a:cs typeface="Pretendard" charset="0"/>
@@ -6126,7 +6214,7 @@
                         <a:buNone/>
                       </a:pPr>
                       <a:r>
-                        <a:rPr lang="en-US" sz="2200" dirty="0">
+                        <a:rPr lang="en-US" sz="1800" dirty="0">
                           <a:solidFill>
                             <a:srgbClr val="F8FAFC"/>
                           </a:solidFill>
@@ -6136,7 +6224,7 @@
                         </a:rPr>
                         <a:t>5</a:t>
                       </a:r>
-                      <a:endParaRPr lang="en-US" sz="2200" dirty="0">
+                      <a:endParaRPr lang="en-US" sz="1800" dirty="0">
                         <a:latin typeface="Pretendard" charset="0"/>
                         <a:ea typeface="Pretendard" charset="0"/>
                         <a:cs typeface="Pretendard" charset="0"/>
@@ -6188,7 +6276,7 @@
                   </a:tcPr>
                 </a:tc>
               </a:tr>
-              <a:tr h="1120140">
+              <a:tr h="1131570">
                 <a:tc>
                   <a:txBody>
                     <a:bodyPr/>
@@ -6198,7 +6286,7 @@
                         <a:buNone/>
                       </a:pPr>
                       <a:r>
-                        <a:rPr lang="en-US" sz="2200" b="1" dirty="0">
+                        <a:rPr lang="en-US" sz="1800" b="1" dirty="0">
                           <a:solidFill>
                             <a:srgbClr val="F8FAFC"/>
                           </a:solidFill>
@@ -6208,7 +6296,7 @@
                         </a:rPr>
                         <a:t>PPTX</a:t>
                       </a:r>
-                      <a:endParaRPr lang="en-US" sz="2200" dirty="0">
+                      <a:endParaRPr lang="en-US" sz="1800" dirty="0">
                         <a:latin typeface="Pretendard" charset="0"/>
                         <a:ea typeface="Pretendard" charset="0"/>
                         <a:cs typeface="Pretendard" charset="0"/>
@@ -6263,7 +6351,7 @@
                         <a:buNone/>
                       </a:pPr>
                       <a:r>
-                        <a:rPr lang="en-US" sz="2200" dirty="0">
+                        <a:rPr lang="en-US" sz="1800" dirty="0">
                           <a:solidFill>
                             <a:srgbClr val="F8FAFC"/>
                           </a:solidFill>
@@ -6273,7 +6361,7 @@
                         </a:rPr>
                         <a:t>95</a:t>
                       </a:r>
-                      <a:endParaRPr lang="en-US" sz="2200" dirty="0">
+                      <a:endParaRPr lang="en-US" sz="1800" dirty="0">
                         <a:latin typeface="Pretendard" charset="0"/>
                         <a:ea typeface="Pretendard" charset="0"/>
                         <a:cs typeface="Pretendard" charset="0"/>
@@ -6328,7 +6416,7 @@
                         <a:buNone/>
                       </a:pPr>
                       <a:r>
-                        <a:rPr lang="en-US" sz="2200" dirty="0">
+                        <a:rPr lang="en-US" sz="1800" dirty="0">
                           <a:solidFill>
                             <a:srgbClr val="F8FAFC"/>
                           </a:solidFill>
@@ -6338,7 +6426,7 @@
                         </a:rPr>
                         <a:t>2</a:t>
                       </a:r>
-                      <a:endParaRPr lang="en-US" sz="2200" dirty="0">
+                      <a:endParaRPr lang="en-US" sz="1800" dirty="0">
                         <a:latin typeface="Pretendard" charset="0"/>
                         <a:ea typeface="Pretendard" charset="0"/>
                         <a:cs typeface="Pretendard" charset="0"/>
